--- a/figs/draft_figs_foraging_paper.pptx
+++ b/figs/draft_figs_foraging_paper.pptx
@@ -155,7 +155,7 @@
       </p:ext>
     </p:extLst>
   </p:cmAuthor>
-  <p:cmAuthor id="2" name="Emma Scholey (PhD Psychology Lab FT)" initials="ES(PLF" lastIdx="64" clrIdx="1">
+  <p:cmAuthor id="2" name="Emma Scholey (PhD Psychology Lab FT)" initials="ES(PLF" lastIdx="65" clrIdx="1">
     <p:extLst>
       <p:ext uri="{19B8F6BF-5375-455C-9EA6-DF929625EA0E}">
         <p15:presenceInfo xmlns:p15="http://schemas.microsoft.com/office/powerpoint/2012/main" userId="S::exs165@student.bham.ac.uk::b8267b62-ea09-491f-89e3-b1308758bc50" providerId="AD"/>
@@ -268,7 +268,7 @@
   </p:cm>
   <p:cm authorId="2" dt="2023-08-08T16:24:44.694" idx="24">
     <p:pos x="1262" y="606"/>
-    <p:text>Panel a has MVT beta's overlaid, whereas panel b and c have expected group participant beta's from leaving times overlaid. This could cause confusion, but want to show clear SD prediction at the plateau in fig c. Ideas?</p:text>
+    <p:text>Panel a has MVT beta's overlaid, whereas panel b and c have expected group participant beta's from leaving times overlaid. This is confusing, but want to show clear SD prediction at the plateau in fig c. Ideas?</p:text>
     <p:extLst>
       <p:ext uri="{C676402C-5697-4E1C-873F-D02D1690AC5C}">
         <p15:threadingInfo xmlns:p15="http://schemas.microsoft.com/office/powerpoint/2012/main" timeZoneBias="-60"/>
@@ -290,7 +290,7 @@
     </p:extLst>
   </p:cm>
   <p:cm authorId="2" dt="2023-08-09T11:57:01.676" idx="45">
-    <p:pos x="1308" y="1764"/>
+    <p:pos x="1078" y="1891"/>
     <p:text>Need to look into why learning rho model works better</p:text>
     <p:extLst>
       <p:ext uri="{C676402C-5697-4E1C-873F-D02D1690AC5C}">
@@ -306,15 +306,6 @@
   <p:cm authorId="2" dt="2023-08-08T16:24:44.694" idx="34">
     <p:pos x="1292" y="516"/>
     <p:text>Panel a has MVT beta's overlaid, whereas panel b and c have expected group participant beta's from leaving times overlaid. This could confusion, but want to show clear SD prediction at the plateau in fig c. Ideas?</p:text>
-    <p:extLst>
-      <p:ext uri="{C676402C-5697-4E1C-873F-D02D1690AC5C}">
-        <p15:threadingInfo xmlns:p15="http://schemas.microsoft.com/office/powerpoint/2012/main" timeZoneBias="-60"/>
-      </p:ext>
-    </p:extLst>
-  </p:cm>
-  <p:cm authorId="2" dt="2023-08-08T16:33:04.911" idx="36">
-    <p:pos x="1110" y="484"/>
-    <p:text>Need to overlay MVT avgRR on here</p:text>
     <p:extLst>
       <p:ext uri="{C676402C-5697-4E1C-873F-D02D1690AC5C}">
         <p15:threadingInfo xmlns:p15="http://schemas.microsoft.com/office/powerpoint/2012/main" timeZoneBias="-60"/>
@@ -339,14 +330,12 @@
       </p:ext>
     </p:extLst>
   </p:cm>
-  <p:cm authorId="2" dt="2023-08-15T15:07:24.587" idx="59">
-    <p:pos x="2605" y="4464"/>
-    <p:text>Related to above comment about trying other models e.g. hyperbolic discount model</p:text>
+  <p:cm authorId="2" dt="2023-08-21T12:27:18.854" idx="65">
+    <p:pos x="1122" y="644"/>
+    <p:text>Need to confirm with authors these MVT optimal reward rates</p:text>
     <p:extLst>
       <p:ext uri="{C676402C-5697-4E1C-873F-D02D1690AC5C}">
-        <p15:threadingInfo xmlns:p15="http://schemas.microsoft.com/office/powerpoint/2012/main" timeZoneBias="-60">
-          <p15:parentCm authorId="2" idx="41"/>
-        </p15:threadingInfo>
+        <p15:threadingInfo xmlns:p15="http://schemas.microsoft.com/office/powerpoint/2012/main" timeZoneBias="-60"/>
       </p:ext>
     </p:extLst>
   </p:cm>
@@ -357,7 +346,7 @@
 <p:cmLst xmlns:a="http://schemas.openxmlformats.org/drawingml/2006/main" xmlns:r="http://schemas.openxmlformats.org/officeDocument/2006/relationships" xmlns:p="http://schemas.openxmlformats.org/presentationml/2006/main">
   <p:cm authorId="2" dt="2023-08-11T15:15:19.786" idx="52">
     <p:pos x="10" y="10"/>
-    <p:text>Tested 2 parameter 'hyperbolic' models but BIC was much larger - ignore</p:text>
+    <p:text>Tested 2 parameter 'hyperbolic' models but BIC was much larger and made ugly plots - ignore these? </p:text>
     <p:extLst>
       <p:ext uri="{C676402C-5697-4E1C-873F-D02D1690AC5C}">
         <p15:threadingInfo xmlns:p15="http://schemas.microsoft.com/office/powerpoint/2012/main" timeZoneBias="-60"/>
@@ -371,7 +360,7 @@
 <p:cmLst xmlns:a="http://schemas.openxmlformats.org/drawingml/2006/main" xmlns:r="http://schemas.openxmlformats.org/officeDocument/2006/relationships" xmlns:p="http://schemas.openxmlformats.org/presentationml/2006/main">
   <p:cm authorId="2" dt="2023-08-15T13:50:34.438" idx="55">
     <p:pos x="10" y="10"/>
-    <p:text>Tested equivalent of M1 with all the models. Expected RW model to win (as M5 won before, with RW update of rho at each timestep, which would be equivalent to a scalar RW model?)</p:text>
+    <p:text>Tested equivalent of M1 with all the models. Expected scalar RW model to win (as M5 won before, with RW update of rho at each timestep). I should probably also test equivalent of M5 with avgRR function too?  </p:text>
     <p:extLst>
       <p:ext uri="{C676402C-5697-4E1C-873F-D02D1690AC5C}">
         <p15:threadingInfo xmlns:p15="http://schemas.microsoft.com/office/powerpoint/2012/main" timeZoneBias="-60"/>
@@ -463,7 +452,7 @@
           <a:p>
             <a:fld id="{63A39B59-0D06-1146-9E1B-F17099F2073F}" type="datetimeFigureOut">
               <a:rPr lang="en-US" smtClean="0"/>
-              <a:t>8/7/23</a:t>
+              <a:t>8/21/23</a:t>
             </a:fld>
             <a:endParaRPr lang="en-US"/>
           </a:p>
@@ -1534,7 +1523,7 @@
           <a:p>
             <a:fld id="{C50955E0-3E6F-4141-9EF3-F24898B05313}" type="datetimeFigureOut">
               <a:rPr lang="en-US" smtClean="0"/>
-              <a:t>8/7/23</a:t>
+              <a:t>8/21/23</a:t>
             </a:fld>
             <a:endParaRPr lang="en-US"/>
           </a:p>
@@ -1704,7 +1693,7 @@
           <a:p>
             <a:fld id="{C50955E0-3E6F-4141-9EF3-F24898B05313}" type="datetimeFigureOut">
               <a:rPr lang="en-US" smtClean="0"/>
-              <a:t>8/7/23</a:t>
+              <a:t>8/21/23</a:t>
             </a:fld>
             <a:endParaRPr lang="en-US"/>
           </a:p>
@@ -1884,7 +1873,7 @@
           <a:p>
             <a:fld id="{C50955E0-3E6F-4141-9EF3-F24898B05313}" type="datetimeFigureOut">
               <a:rPr lang="en-US" smtClean="0"/>
-              <a:t>8/7/23</a:t>
+              <a:t>8/21/23</a:t>
             </a:fld>
             <a:endParaRPr lang="en-US"/>
           </a:p>
@@ -2054,7 +2043,7 @@
           <a:p>
             <a:fld id="{C50955E0-3E6F-4141-9EF3-F24898B05313}" type="datetimeFigureOut">
               <a:rPr lang="en-US" smtClean="0"/>
-              <a:t>8/7/23</a:t>
+              <a:t>8/21/23</a:t>
             </a:fld>
             <a:endParaRPr lang="en-US"/>
           </a:p>
@@ -2298,7 +2287,7 @@
           <a:p>
             <a:fld id="{C50955E0-3E6F-4141-9EF3-F24898B05313}" type="datetimeFigureOut">
               <a:rPr lang="en-US" smtClean="0"/>
-              <a:t>8/7/23</a:t>
+              <a:t>8/21/23</a:t>
             </a:fld>
             <a:endParaRPr lang="en-US"/>
           </a:p>
@@ -2530,7 +2519,7 @@
           <a:p>
             <a:fld id="{C50955E0-3E6F-4141-9EF3-F24898B05313}" type="datetimeFigureOut">
               <a:rPr lang="en-US" smtClean="0"/>
-              <a:t>8/7/23</a:t>
+              <a:t>8/21/23</a:t>
             </a:fld>
             <a:endParaRPr lang="en-US"/>
           </a:p>
@@ -2897,7 +2886,7 @@
           <a:p>
             <a:fld id="{C50955E0-3E6F-4141-9EF3-F24898B05313}" type="datetimeFigureOut">
               <a:rPr lang="en-US" smtClean="0"/>
-              <a:t>8/7/23</a:t>
+              <a:t>8/21/23</a:t>
             </a:fld>
             <a:endParaRPr lang="en-US"/>
           </a:p>
@@ -3015,7 +3004,7 @@
           <a:p>
             <a:fld id="{C50955E0-3E6F-4141-9EF3-F24898B05313}" type="datetimeFigureOut">
               <a:rPr lang="en-US" smtClean="0"/>
-              <a:t>8/7/23</a:t>
+              <a:t>8/21/23</a:t>
             </a:fld>
             <a:endParaRPr lang="en-US"/>
           </a:p>
@@ -3110,7 +3099,7 @@
           <a:p>
             <a:fld id="{C50955E0-3E6F-4141-9EF3-F24898B05313}" type="datetimeFigureOut">
               <a:rPr lang="en-US" smtClean="0"/>
-              <a:t>8/7/23</a:t>
+              <a:t>8/21/23</a:t>
             </a:fld>
             <a:endParaRPr lang="en-US"/>
           </a:p>
@@ -3387,7 +3376,7 @@
           <a:p>
             <a:fld id="{C50955E0-3E6F-4141-9EF3-F24898B05313}" type="datetimeFigureOut">
               <a:rPr lang="en-US" smtClean="0"/>
-              <a:t>8/7/23</a:t>
+              <a:t>8/21/23</a:t>
             </a:fld>
             <a:endParaRPr lang="en-US"/>
           </a:p>
@@ -3644,7 +3633,7 @@
           <a:p>
             <a:fld id="{C50955E0-3E6F-4141-9EF3-F24898B05313}" type="datetimeFigureOut">
               <a:rPr lang="en-US" smtClean="0"/>
-              <a:t>8/7/23</a:t>
+              <a:t>8/21/23</a:t>
             </a:fld>
             <a:endParaRPr lang="en-US"/>
           </a:p>
@@ -3857,7 +3846,7 @@
           <a:p>
             <a:fld id="{C50955E0-3E6F-4141-9EF3-F24898B05313}" type="datetimeFigureOut">
               <a:rPr lang="en-US" smtClean="0"/>
-              <a:t>8/7/23</a:t>
+              <a:t>8/21/23</a:t>
             </a:fld>
             <a:endParaRPr lang="en-US"/>
           </a:p>
@@ -4313,7 +4302,7 @@
           <a:p>
             <a:r>
               <a:rPr lang="en-US" dirty="0"/>
-              <a:t>7 August 2023</a:t>
+              <a:t>21 August 2023</a:t>
             </a:r>
           </a:p>
         </p:txBody>
@@ -4471,8 +4460,8 @@
         </p:nvSpPr>
         <p:spPr>
           <a:xfrm>
-            <a:off x="230846" y="7845417"/>
-            <a:ext cx="5972534" cy="600164"/>
+            <a:off x="258278" y="7845417"/>
+            <a:ext cx="5972534" cy="769441"/>
           </a:xfrm>
           <a:prstGeom prst="rect">
             <a:avLst/>
@@ -4499,7 +4488,7 @@
             </a:r>
             <a:r>
               <a:rPr lang="en-US" sz="1100" dirty="0"/>
-              <a:t>(7) = -1.97, </a:t>
+              <a:t>(11.4) = -1.59, </a:t>
             </a:r>
             <a:r>
               <a:rPr lang="en-US" sz="1100" i="1" dirty="0"/>
@@ -4507,7 +4496,7 @@
             </a:r>
             <a:r>
               <a:rPr lang="en-US" sz="1100" dirty="0"/>
-              <a:t> = 0.09]. </a:t>
+              <a:t> = 0.14]. [Welch t-test due to unequal variance].</a:t>
             </a:r>
           </a:p>
           <a:p>
@@ -4517,7 +4506,7 @@
             </a:r>
             <a:r>
               <a:rPr lang="en-US" sz="1100" dirty="0"/>
-              <a:t>Participant leaving times are not significantly correlated with their fit alpha rho [Rich env: </a:t>
+              <a:t>Participant leaving times are not significantly correlated with their fit alpha rho [</a:t>
             </a:r>
             <a:r>
               <a:rPr lang="en-US" sz="1100" i="1" dirty="0"/>
@@ -4525,7 +4514,7 @@
             </a:r>
             <a:r>
               <a:rPr lang="en-US" sz="1100" dirty="0"/>
-              <a:t>(27) = -.32, </a:t>
+              <a:t>(14) = .03, </a:t>
             </a:r>
             <a:r>
               <a:rPr lang="en-US" sz="1100" i="1" dirty="0"/>
@@ -4533,23 +4522,7 @@
             </a:r>
             <a:r>
               <a:rPr lang="en-US" sz="1100" dirty="0"/>
-              <a:t> = 0.43; Poor env: </a:t>
-            </a:r>
-            <a:r>
-              <a:rPr lang="en-US" sz="1100" i="1" dirty="0"/>
-              <a:t>r</a:t>
-            </a:r>
-            <a:r>
-              <a:rPr lang="en-US" sz="1100" dirty="0"/>
-              <a:t>(27) = -.66, </a:t>
-            </a:r>
-            <a:r>
-              <a:rPr lang="en-US" sz="1100" i="1" dirty="0"/>
-              <a:t>p</a:t>
-            </a:r>
-            <a:r>
-              <a:rPr lang="en-US" sz="1100" dirty="0"/>
-              <a:t> = .07). </a:t>
+              <a:t> = 0.93] [Spearman’s rho] </a:t>
             </a:r>
           </a:p>
         </p:txBody>
@@ -5035,7 +5008,7 @@
         <p:spPr>
           <a:xfrm>
             <a:off x="79375" y="8116128"/>
-            <a:ext cx="6699250" cy="1107996"/>
+            <a:ext cx="6699250" cy="1785104"/>
           </a:xfrm>
           <a:prstGeom prst="rect">
             <a:avLst/>
@@ -5053,7 +5026,15 @@
             </a:pPr>
             <a:r>
               <a:rPr lang="en-US" sz="1100" dirty="0"/>
-              <a:t>BIC comparison of all models – simplest scalar model with one parameter wins, when using their real experienced average reward rate in each block. </a:t>
+              <a:t>BIC comparison of how beta arises from </a:t>
+            </a:r>
+            <a:r>
+              <a:rPr lang="en-US" sz="1100" dirty="0" err="1"/>
+              <a:t>averageRR</a:t>
+            </a:r>
+            <a:r>
+              <a:rPr lang="en-US" sz="1100" dirty="0"/>
+              <a:t> – simplest scalar model with one parameter wins, when using their real experienced average reward rate in each block. </a:t>
             </a:r>
           </a:p>
           <a:p>
@@ -5080,7 +5061,23 @@
             </a:r>
             <a:r>
               <a:rPr lang="en-US" sz="1100" dirty="0"/>
-              <a:t>Correlation of participant lambda fits with participant mean leaving times </a:t>
+              <a:t>Correlation of participant lambda fits with participant mean leaving times  [</a:t>
+            </a:r>
+            <a:r>
+              <a:rPr lang="en-US" sz="1100" i="1" dirty="0"/>
+              <a:t>r</a:t>
+            </a:r>
+            <a:r>
+              <a:rPr lang="en-US" sz="1100" dirty="0"/>
+              <a:t>(37) = 0.99, </a:t>
+            </a:r>
+            <a:r>
+              <a:rPr lang="en-US" sz="1100" i="1" dirty="0"/>
+              <a:t>p</a:t>
+            </a:r>
+            <a:r>
+              <a:rPr lang="en-US" sz="1100" dirty="0"/>
+              <a:t> &lt; .001].</a:t>
             </a:r>
           </a:p>
           <a:p>
@@ -5090,8 +5087,85 @@
             </a:r>
             <a:r>
               <a:rPr lang="en-US" sz="1100" dirty="0"/>
-              <a:t>SD analysis participants and (f) SD analysis simulated model aren’t statistically different across patch/env, as model predicts</a:t>
-            </a:r>
+              <a:t>SD of </a:t>
+            </a:r>
+            <a:r>
+              <a:rPr lang="en-US" sz="1100" b="1" dirty="0"/>
+              <a:t>participants</a:t>
+            </a:r>
+            <a:r>
+              <a:rPr lang="en-US" sz="1100" dirty="0"/>
+              <a:t> was not significantly different across patch, environment or interaction (statistics reported in Fig 2) </a:t>
+            </a:r>
+          </a:p>
+          <a:p>
+            <a:r>
+              <a:rPr lang="en-US" sz="1100" b="1" dirty="0"/>
+              <a:t>f) </a:t>
+            </a:r>
+            <a:r>
+              <a:rPr lang="en-US" sz="1100" dirty="0"/>
+              <a:t>Consistent with participants, SD of </a:t>
+            </a:r>
+            <a:r>
+              <a:rPr lang="en-US" sz="1100" b="1" dirty="0"/>
+              <a:t>simulated </a:t>
+            </a:r>
+            <a:r>
+              <a:rPr lang="en-US" sz="1100" dirty="0"/>
+              <a:t>leaving times was not significantly different across patch, environment or interaction [Patch yield: </a:t>
+            </a:r>
+            <a:r>
+              <a:rPr lang="en-US" sz="1100" i="1" dirty="0"/>
+              <a:t>F</a:t>
+            </a:r>
+            <a:r>
+              <a:rPr lang="en-US" sz="1100" dirty="0"/>
+              <a:t>(2,228) = 1.24, </a:t>
+            </a:r>
+            <a:r>
+              <a:rPr lang="en-US" sz="1100" i="1" dirty="0"/>
+              <a:t>p</a:t>
+            </a:r>
+            <a:r>
+              <a:rPr lang="en-US" sz="1100" dirty="0"/>
+              <a:t> = 0.29; Environment: </a:t>
+            </a:r>
+            <a:r>
+              <a:rPr lang="en-US" sz="1100" i="1" dirty="0"/>
+              <a:t>F</a:t>
+            </a:r>
+            <a:r>
+              <a:rPr lang="en-US" sz="1100" dirty="0"/>
+              <a:t>(1,228) = 0.29, </a:t>
+            </a:r>
+            <a:r>
+              <a:rPr lang="en-US" sz="1100" i="1" dirty="0"/>
+              <a:t>p</a:t>
+            </a:r>
+            <a:r>
+              <a:rPr lang="en-US" sz="1100" dirty="0"/>
+              <a:t> = 0.59; Interaction: </a:t>
+            </a:r>
+            <a:r>
+              <a:rPr lang="en-US" sz="1100" i="1" dirty="0"/>
+              <a:t>F</a:t>
+            </a:r>
+            <a:r>
+              <a:rPr lang="en-US" sz="1100" dirty="0"/>
+              <a:t>(2,228) = 0.60, </a:t>
+            </a:r>
+            <a:r>
+              <a:rPr lang="en-US" sz="1100" i="1" dirty="0"/>
+              <a:t>p</a:t>
+            </a:r>
+            <a:r>
+              <a:rPr lang="en-US" sz="1100" dirty="0"/>
+              <a:t> = 0.55]. </a:t>
+            </a:r>
+          </a:p>
+          <a:p>
+            <a:endParaRPr lang="en-US" sz="1100" dirty="0"/>
           </a:p>
         </p:txBody>
       </p:sp>
@@ -5415,7 +5489,15 @@
             </a:pPr>
             <a:r>
               <a:rPr lang="en-US" sz="1100" dirty="0"/>
-              <a:t>BIC comparison of all models for Contreras-Huerta dataset – same simple model wins.</a:t>
+              <a:t>BIC comparison of all </a:t>
+            </a:r>
+            <a:r>
+              <a:rPr lang="en-US" sz="1100" dirty="0" err="1"/>
+              <a:t>avgRR</a:t>
+            </a:r>
+            <a:r>
+              <a:rPr lang="en-US" sz="1100" dirty="0"/>
+              <a:t> functions for Contreras-Huerta dataset – same simple model wins.</a:t>
             </a:r>
           </a:p>
           <a:p>
@@ -5425,7 +5507,15 @@
             </a:pPr>
             <a:r>
               <a:rPr lang="en-US" sz="1100" dirty="0"/>
-              <a:t>BIC comparison of all models for Kane dataset – same simple model wins. </a:t>
+              <a:t>BIC comparison of all </a:t>
+            </a:r>
+            <a:r>
+              <a:rPr lang="en-US" sz="1100" dirty="0" err="1"/>
+              <a:t>avgRR</a:t>
+            </a:r>
+            <a:r>
+              <a:rPr lang="en-US" sz="1100" dirty="0"/>
+              <a:t> functions for Kane dataset – same simple model wins. </a:t>
             </a:r>
           </a:p>
           <a:p>
@@ -5434,13 +5524,13 @@
             </a:pPr>
             <a:r>
               <a:rPr lang="en-US" sz="1100" dirty="0"/>
-              <a:t>Beta function model simulated leaving times and (d) standard deviations looks like participant data for Contreras-Huerta dataset</a:t>
-            </a:r>
-          </a:p>
-          <a:p>
-            <a:r>
-              <a:rPr lang="en-US" sz="1100" dirty="0"/>
-              <a:t>e) Beta function model simulated leaving times looks like participant data for Kane dataset, but standard deviation doesn’t replicate (as we saw with the </a:t>
+              <a:t>For winning function, both simulated leaving times and (d) standard deviations looks like participant data for Contreras-Huerta dataset</a:t>
+            </a:r>
+          </a:p>
+          <a:p>
+            <a:r>
+              <a:rPr lang="en-US" sz="1100" dirty="0"/>
+              <a:t>e) For winning function, simulated leaving times look like participant data for Kane dataset but f) standard deviation doesn’t replicate (as we saw with the </a:t>
             </a:r>
             <a:r>
               <a:rPr lang="en-US" sz="1100" dirty="0" err="1"/>
@@ -6213,7 +6303,7 @@
         <p:spPr>
           <a:xfrm>
             <a:off x="412750" y="8142922"/>
-            <a:ext cx="6134100" cy="1615827"/>
+            <a:ext cx="6134100" cy="1785104"/>
           </a:xfrm>
           <a:prstGeom prst="rect">
             <a:avLst/>
@@ -6242,7 +6332,7 @@
             </a:r>
             <a:r>
               <a:rPr lang="en-US" sz="1100" dirty="0"/>
-              <a:t>Deterministic MVT rule – patch reward rate vs average RR in environment </a:t>
+              <a:t>Introduce deterministic MVT rule: patch reward rate vs average RR in environment </a:t>
             </a:r>
           </a:p>
           <a:p>
@@ -6252,7 +6342,7 @@
             </a:r>
             <a:r>
               <a:rPr lang="en-US" sz="1100" dirty="0"/>
-              <a:t>Expected leaving times for </a:t>
+              <a:t>Introduce </a:t>
             </a:r>
             <a:r>
               <a:rPr lang="en-US" sz="1100" dirty="0" err="1"/>
@@ -6260,7 +6350,15 @@
             </a:r>
             <a:r>
               <a:rPr lang="en-US" sz="1100" dirty="0"/>
-              <a:t> model for range of inverse temperature</a:t>
+              <a:t> model – what does it predict? Expected leaving times for </a:t>
+            </a:r>
+            <a:r>
+              <a:rPr lang="en-US" sz="1100" dirty="0" err="1"/>
+              <a:t>softmax</a:t>
+            </a:r>
+            <a:r>
+              <a:rPr lang="en-US" sz="1100" dirty="0"/>
+              <a:t> model for range of beta</a:t>
             </a:r>
           </a:p>
           <a:p>
@@ -6284,13 +6382,11 @@
             </a:r>
             <a:r>
               <a:rPr lang="en-US" sz="1100" dirty="0"/>
-              <a:t>Overharvesting – increase in leaving times due to increase in inverse temperature (= more exploit)</a:t>
-            </a:r>
-          </a:p>
-          <a:p>
+              <a:t>and</a:t>
+            </a:r>
             <a:r>
               <a:rPr lang="en-US" sz="1100" b="1" dirty="0"/>
-              <a:t>f) </a:t>
+              <a:t> f) </a:t>
             </a:r>
             <a:r>
               <a:rPr lang="en-US" sz="1100" dirty="0" err="1"/>
@@ -6298,58 +6394,57 @@
             </a:r>
             <a:r>
               <a:rPr lang="en-US" sz="1100" dirty="0"/>
-              <a:t> model could theoretically show overharvesting </a:t>
+              <a:t> model could also reproduce overharvesting (increase in leaving times due to increase in inverse temperature (= more exploit))</a:t>
+            </a:r>
+          </a:p>
+          <a:p>
+            <a:r>
+              <a:rPr lang="en-US" sz="1100" b="1" dirty="0"/>
+              <a:t>g) </a:t>
+            </a:r>
+            <a:r>
+              <a:rPr lang="en-US" sz="1100" dirty="0"/>
+              <a:t>Assuming betas that would reproduce overharvesting, the </a:t>
+            </a:r>
+            <a:r>
+              <a:rPr lang="en-US" sz="1100" dirty="0" err="1"/>
+              <a:t>softmax</a:t>
+            </a:r>
+            <a:r>
+              <a:rPr lang="en-US" sz="1100" dirty="0"/>
+              <a:t> model predicts a plateau in the expected SD of leaving times</a:t>
+            </a:r>
+          </a:p>
+          <a:p>
+            <a:r>
+              <a:rPr lang="en-US" sz="1100" b="1" dirty="0"/>
+              <a:t>h) </a:t>
+            </a:r>
+            <a:r>
+              <a:rPr lang="en-US" sz="1100" dirty="0"/>
+              <a:t>and</a:t>
+            </a:r>
+            <a:r>
+              <a:rPr lang="en-US" sz="1100" b="1" dirty="0"/>
+              <a:t> </a:t>
+            </a:r>
+            <a:r>
+              <a:rPr lang="en-US" sz="1100" b="1" dirty="0" err="1"/>
+              <a:t>i</a:t>
+            </a:r>
+            <a:r>
+              <a:rPr lang="en-US" sz="1100" b="1" dirty="0"/>
+              <a:t>) </a:t>
+            </a:r>
+            <a:r>
+              <a:rPr lang="en-US" sz="1100" dirty="0"/>
+              <a:t>A model that isn’t reward-aware (i.e. e-greedy) cannot replicate MVT/overharvesting </a:t>
             </a:r>
             <a:r>
               <a:rPr lang="en-US" sz="1100" dirty="0" err="1"/>
               <a:t>behaviour</a:t>
             </a:r>
-            <a:r>
-              <a:rPr lang="en-US" sz="1100" dirty="0"/>
-              <a:t> </a:t>
-            </a:r>
-          </a:p>
-          <a:p>
-            <a:r>
-              <a:rPr lang="en-US" sz="1100" b="1" dirty="0"/>
-              <a:t>g) </a:t>
-            </a:r>
-            <a:r>
-              <a:rPr lang="en-US" sz="1100" dirty="0"/>
-              <a:t>Expected SD of leaving times for </a:t>
-            </a:r>
-            <a:r>
-              <a:rPr lang="en-US" sz="1100" dirty="0" err="1"/>
-              <a:t>softmax</a:t>
-            </a:r>
-            <a:r>
-              <a:rPr lang="en-US" sz="1100" dirty="0"/>
-              <a:t> model, for range of inverse temperature </a:t>
-            </a:r>
-          </a:p>
-          <a:p>
-            <a:r>
-              <a:rPr lang="en-US" sz="1100" b="1" dirty="0"/>
-              <a:t>h) </a:t>
-            </a:r>
-            <a:r>
-              <a:rPr lang="en-US" sz="1100" dirty="0"/>
-              <a:t>E-greedy expected leaving times </a:t>
-            </a:r>
-          </a:p>
-          <a:p>
-            <a:r>
-              <a:rPr lang="en-US" sz="1100" b="1" dirty="0" err="1"/>
-              <a:t>i</a:t>
-            </a:r>
-            <a:r>
-              <a:rPr lang="en-US" sz="1100" b="1" dirty="0"/>
-              <a:t>) </a:t>
-            </a:r>
-            <a:r>
-              <a:rPr lang="en-US" sz="1100" dirty="0"/>
-              <a:t>E-greedy model cannot replicate patch effect – needs reward aware action policy </a:t>
-            </a:r>
+            <a:endParaRPr lang="en-US" sz="1100" dirty="0"/>
           </a:p>
         </p:txBody>
       </p:sp>
@@ -8042,7 +8137,7 @@
                     <a:p>
                       <a:pPr algn="l" fontAlgn="b"/>
                       <a:r>
-                        <a:rPr lang="en-GB" sz="1000" b="0" i="0" u="none" strike="noStrike">
+                        <a:rPr lang="en-GB" sz="1000" b="0" i="0" u="none" strike="noStrike" dirty="0">
                           <a:solidFill>
                             <a:srgbClr val="000000"/>
                           </a:solidFill>
@@ -9202,7 +9297,7 @@
             </a:r>
             <a:r>
               <a:rPr lang="en-US" sz="1100" dirty="0"/>
-              <a:t>model fit MLE from simulations </a:t>
+              <a:t>simulated leave times from best model</a:t>
             </a:r>
           </a:p>
           <a:p>
@@ -9238,7 +9333,7 @@
             </a:r>
             <a:r>
               <a:rPr lang="en-US" sz="1100" dirty="0"/>
-              <a:t>Correlation of participant beta fits with participant mean leaving times [Rich env: </a:t>
+              <a:t>Correlation of participant beta fits with participant mean leaving times across environments [</a:t>
             </a:r>
             <a:r>
               <a:rPr lang="en-US" sz="1100" i="1" dirty="0"/>
@@ -9246,7 +9341,7 @@
             </a:r>
             <a:r>
               <a:rPr lang="en-US" sz="1100" dirty="0"/>
-              <a:t>(37) = 0.88, </a:t>
+              <a:t>(76) = 0.99, </a:t>
             </a:r>
             <a:r>
               <a:rPr lang="en-US" sz="1100" i="1" dirty="0"/>
@@ -9254,15 +9349,37 @@
             </a:r>
             <a:r>
               <a:rPr lang="en-US" sz="1100" dirty="0"/>
-              <a:t> &lt; .001; Poor env:</a:t>
+              <a:t> &lt; .001]</a:t>
+            </a:r>
+          </a:p>
+          <a:p>
+            <a:r>
+              <a:rPr lang="en-US" sz="1100" b="1" dirty="0" err="1"/>
+              <a:t>i</a:t>
+            </a:r>
+            <a:r>
+              <a:rPr lang="en-US" sz="1100" b="1" dirty="0"/>
+              <a:t>) </a:t>
+            </a:r>
+            <a:r>
+              <a:rPr lang="en-US" sz="1100" dirty="0"/>
+              <a:t>SD of </a:t>
+            </a:r>
+            <a:r>
+              <a:rPr lang="en-US" sz="1100" b="1" dirty="0"/>
+              <a:t>participants</a:t>
+            </a:r>
+            <a:r>
+              <a:rPr lang="en-US" sz="1100" dirty="0"/>
+              <a:t> was not significantly different across patch, environment or interaction [Patch yield: </a:t>
             </a:r>
             <a:r>
               <a:rPr lang="en-US" sz="1100" i="1" dirty="0"/>
-              <a:t> r</a:t>
-            </a:r>
-            <a:r>
-              <a:rPr lang="en-US" sz="1100" dirty="0"/>
-              <a:t>(37) = 0.96, </a:t>
+              <a:t>F</a:t>
+            </a:r>
+            <a:r>
+              <a:rPr lang="en-US" sz="1100" dirty="0"/>
+              <a:t>(2,228) = 1.77, </a:t>
             </a:r>
             <a:r>
               <a:rPr lang="en-US" sz="1100" i="1" dirty="0"/>
@@ -9270,21 +9387,7 @@
             </a:r>
             <a:r>
               <a:rPr lang="en-US" sz="1100" dirty="0"/>
-              <a:t> &lt; .001]</a:t>
-            </a:r>
-          </a:p>
-          <a:p>
-            <a:r>
-              <a:rPr lang="en-US" sz="1100" b="1" dirty="0" err="1"/>
-              <a:t>i</a:t>
-            </a:r>
-            <a:r>
-              <a:rPr lang="en-US" sz="1100" b="1" dirty="0"/>
-              <a:t>) </a:t>
-            </a:r>
-            <a:r>
-              <a:rPr lang="en-US" sz="1100" dirty="0"/>
-              <a:t>SD of participants was not significantly different across patch, environment or interaction [Patch yield: </a:t>
+              <a:t> = 0.17; Environment: </a:t>
             </a:r>
             <a:r>
               <a:rPr lang="en-US" sz="1100" i="1" dirty="0"/>
@@ -9292,7 +9395,7 @@
             </a:r>
             <a:r>
               <a:rPr lang="en-US" sz="1100" dirty="0"/>
-              <a:t>(2,228) = 1.77, </a:t>
+              <a:t>(1,228) = 1.03, </a:t>
             </a:r>
             <a:r>
               <a:rPr lang="en-US" sz="1100" i="1" dirty="0"/>
@@ -9300,7 +9403,7 @@
             </a:r>
             <a:r>
               <a:rPr lang="en-US" sz="1100" dirty="0"/>
-              <a:t> = 0.17; Environment: </a:t>
+              <a:t> = 0.31; Interaction: </a:t>
             </a:r>
             <a:r>
               <a:rPr lang="en-US" sz="1100" i="1" dirty="0"/>
@@ -9308,7 +9411,7 @@
             </a:r>
             <a:r>
               <a:rPr lang="en-US" sz="1100" dirty="0"/>
-              <a:t>(1,228) = 1.03, </a:t>
+              <a:t>(2,228) = 0.29, </a:t>
             </a:r>
             <a:r>
               <a:rPr lang="en-US" sz="1100" i="1" dirty="0"/>
@@ -9316,22 +9419,6 @@
             </a:r>
             <a:r>
               <a:rPr lang="en-US" sz="1100" dirty="0"/>
-              <a:t> = 0.31; Interaction: </a:t>
-            </a:r>
-            <a:r>
-              <a:rPr lang="en-US" sz="1100" i="1" dirty="0"/>
-              <a:t>F</a:t>
-            </a:r>
-            <a:r>
-              <a:rPr lang="en-US" sz="1100" dirty="0"/>
-              <a:t>(2,228) = 0.29, </a:t>
-            </a:r>
-            <a:r>
-              <a:rPr lang="en-US" sz="1100" i="1" dirty="0"/>
-              <a:t>p</a:t>
-            </a:r>
-            <a:r>
-              <a:rPr lang="en-US" sz="1100" dirty="0"/>
               <a:t> = 0.75], as model predicts</a:t>
             </a:r>
           </a:p>
@@ -9342,7 +9429,15 @@
             </a:r>
             <a:r>
               <a:rPr lang="en-US" sz="1100" dirty="0"/>
-              <a:t>Consistent with participants, SD of simulated leaving times was not significantly different across patch, environment or interaction [Patch yield: </a:t>
+              <a:t>Consistent with participants, SD of </a:t>
+            </a:r>
+            <a:r>
+              <a:rPr lang="en-US" sz="1100" b="1" dirty="0"/>
+              <a:t>simulated </a:t>
+            </a:r>
+            <a:r>
+              <a:rPr lang="en-US" sz="1100" dirty="0"/>
+              <a:t>leaving times was not significantly different across patch, environment or interaction [Patch yield: </a:t>
             </a:r>
             <a:r>
               <a:rPr lang="en-US" sz="1100" i="1" dirty="0"/>
@@ -9995,12 +10090,47 @@
           </a:p>
         </p:txBody>
       </p:sp>
+      <p:sp>
+        <p:nvSpPr>
+          <p:cNvPr id="4" name="TextBox 3">
+            <a:extLst>
+              <a:ext uri="{FF2B5EF4-FFF2-40B4-BE49-F238E27FC236}">
+                <a16:creationId xmlns:a16="http://schemas.microsoft.com/office/drawing/2014/main" id="{66462979-B6DA-0E43-C4CB-604BAB876E7F}"/>
+              </a:ext>
+            </a:extLst>
+          </p:cNvPr>
+          <p:cNvSpPr txBox="1"/>
+          <p:nvPr/>
+        </p:nvSpPr>
+        <p:spPr>
+          <a:xfrm>
+            <a:off x="214686" y="1828800"/>
+            <a:ext cx="5327677" cy="369332"/>
+          </a:xfrm>
+          <a:prstGeom prst="rect">
+            <a:avLst/>
+          </a:prstGeom>
+          <a:noFill/>
+        </p:spPr>
+        <p:txBody>
+          <a:bodyPr wrap="none" rtlCol="0">
+            <a:spAutoFit/>
+          </a:bodyPr>
+          <a:lstStyle/>
+          <a:p>
+            <a:r>
+              <a:rPr lang="en-US" dirty="0"/>
+              <a:t>Parameter recovery for winning models (each dataset) </a:t>
+            </a:r>
+          </a:p>
+        </p:txBody>
+      </p:sp>
       <p:graphicFrame>
         <p:nvGraphicFramePr>
-          <p:cNvPr id="3" name="Table 2">
-            <a:extLst>
-              <a:ext uri="{FF2B5EF4-FFF2-40B4-BE49-F238E27FC236}">
-                <a16:creationId xmlns:a16="http://schemas.microsoft.com/office/drawing/2014/main" id="{64D49DE9-9775-6F90-4000-F28BA35160A1}"/>
+          <p:cNvPr id="5" name="Table 4">
+            <a:extLst>
+              <a:ext uri="{FF2B5EF4-FFF2-40B4-BE49-F238E27FC236}">
+                <a16:creationId xmlns:a16="http://schemas.microsoft.com/office/drawing/2014/main" id="{83CFF4BC-A50A-B012-0E33-A4B68A45EA04}"/>
               </a:ext>
             </a:extLst>
           </p:cNvPr>
@@ -10010,14 +10140,14 @@
           <p:nvPr>
             <p:extLst>
               <p:ext uri="{D42A27DB-BD31-4B8C-83A1-F6EECF244321}">
-                <p14:modId xmlns:p14="http://schemas.microsoft.com/office/powerpoint/2010/main" val="3239113723"/>
+                <p14:modId xmlns:p14="http://schemas.microsoft.com/office/powerpoint/2010/main" val="3790407011"/>
               </p:ext>
             </p:extLst>
           </p:nvPr>
         </p:nvGraphicFramePr>
         <p:xfrm>
-          <a:off x="340802" y="2393564"/>
-          <a:ext cx="3632201" cy="2844800"/>
+          <a:off x="951719" y="2674326"/>
+          <a:ext cx="3632201" cy="2032000"/>
         </p:xfrm>
         <a:graphic>
           <a:graphicData uri="http://schemas.openxmlformats.org/drawingml/2006/table">
@@ -10029,28 +10159,28 @@
                 <a:gridCol w="1152677">
                   <a:extLst>
                     <a:ext uri="{9D8B030D-6E8A-4147-A177-3AD203B41FA5}">
-                      <a16:colId xmlns:a16="http://schemas.microsoft.com/office/drawing/2014/main" val="1420332180"/>
+                      <a16:colId xmlns:a16="http://schemas.microsoft.com/office/drawing/2014/main" val="2619168398"/>
                     </a:ext>
                   </a:extLst>
                 </a:gridCol>
                 <a:gridCol w="826508">
                   <a:extLst>
                     <a:ext uri="{9D8B030D-6E8A-4147-A177-3AD203B41FA5}">
-                      <a16:colId xmlns:a16="http://schemas.microsoft.com/office/drawing/2014/main" val="252702654"/>
+                      <a16:colId xmlns:a16="http://schemas.microsoft.com/office/drawing/2014/main" val="1400378939"/>
                     </a:ext>
                   </a:extLst>
                 </a:gridCol>
                 <a:gridCol w="826508">
                   <a:extLst>
                     <a:ext uri="{9D8B030D-6E8A-4147-A177-3AD203B41FA5}">
-                      <a16:colId xmlns:a16="http://schemas.microsoft.com/office/drawing/2014/main" val="3715519273"/>
+                      <a16:colId xmlns:a16="http://schemas.microsoft.com/office/drawing/2014/main" val="2661850309"/>
                     </a:ext>
                   </a:extLst>
                 </a:gridCol>
                 <a:gridCol w="826508">
                   <a:extLst>
                     <a:ext uri="{9D8B030D-6E8A-4147-A177-3AD203B41FA5}">
-                      <a16:colId xmlns:a16="http://schemas.microsoft.com/office/drawing/2014/main" val="2799433395"/>
+                      <a16:colId xmlns:a16="http://schemas.microsoft.com/office/drawing/2014/main" val="1026345803"/>
                     </a:ext>
                   </a:extLst>
                 </a:gridCol>
@@ -10106,7 +10236,7 @@
                         <a:rPr lang="en-GB" sz="1200" u="none" strike="noStrike">
                           <a:effectLst/>
                         </a:rPr>
-                        <a:t>Lambda</a:t>
+                        <a:t>Alpha rho</a:t>
                       </a:r>
                       <a:endParaRPr lang="en-GB" sz="1200" b="0" i="0" u="none" strike="noStrike">
                         <a:solidFill>
@@ -10129,7 +10259,7 @@
                         <a:rPr lang="en-GB" sz="1200" u="none" strike="noStrike">
                           <a:effectLst/>
                         </a:rPr>
-                        <a:t>Alpha rho</a:t>
+                        <a:t>Lambda</a:t>
                       </a:r>
                       <a:endParaRPr lang="en-GB" sz="1200" b="0" i="0" u="none" strike="noStrike">
                         <a:solidFill>
@@ -10144,7 +10274,7 @@
                 </a:tc>
                 <a:extLst>
                   <a:ext uri="{0D108BD9-81ED-4DB2-BD59-A6C34878D82A}">
-                    <a16:rowId xmlns:a16="http://schemas.microsoft.com/office/drawing/2014/main" val="2934669948"/>
+                    <a16:rowId xmlns:a16="http://schemas.microsoft.com/office/drawing/2014/main" val="2376695869"/>
                   </a:ext>
                 </a:extLst>
               </a:tr>
@@ -10182,7 +10312,7 @@
                         <a:rPr lang="en-GB" sz="1200" u="none" strike="noStrike">
                           <a:effectLst/>
                         </a:rPr>
-                        <a:t>0.989</a:t>
+                        <a:t>0.996</a:t>
                       </a:r>
                       <a:endParaRPr lang="en-GB" sz="1200" b="0" i="0" u="none" strike="noStrike">
                         <a:solidFill>
@@ -10231,7 +10361,7 @@
                 </a:tc>
                 <a:extLst>
                   <a:ext uri="{0D108BD9-81ED-4DB2-BD59-A6C34878D82A}">
-                    <a16:rowId xmlns:a16="http://schemas.microsoft.com/office/drawing/2014/main" val="3804378260"/>
+                    <a16:rowId xmlns:a16="http://schemas.microsoft.com/office/drawing/2014/main" val="1995964230"/>
                   </a:ext>
                 </a:extLst>
               </a:tr>
@@ -10269,7 +10399,7 @@
                         <a:rPr lang="en-GB" sz="1200" u="none" strike="noStrike">
                           <a:effectLst/>
                         </a:rPr>
-                        <a:t>0.977</a:t>
+                        <a:t>0.995</a:t>
                       </a:r>
                       <a:endParaRPr lang="en-GB" sz="1200" b="0" i="0" u="none" strike="noStrike">
                         <a:solidFill>
@@ -10318,7 +10448,7 @@
                 </a:tc>
                 <a:extLst>
                   <a:ext uri="{0D108BD9-81ED-4DB2-BD59-A6C34878D82A}">
-                    <a16:rowId xmlns:a16="http://schemas.microsoft.com/office/drawing/2014/main" val="2141822426"/>
+                    <a16:rowId xmlns:a16="http://schemas.microsoft.com/office/drawing/2014/main" val="4202698368"/>
                   </a:ext>
                 </a:extLst>
               </a:tr>
@@ -10333,7 +10463,7 @@
                         <a:rPr lang="en-GB" sz="1200" u="none" strike="noStrike">
                           <a:effectLst/>
                         </a:rPr>
-                        <a:t>M1 CH rich</a:t>
+                        <a:t>M5 CH rich</a:t>
                       </a:r>
                       <a:endParaRPr lang="en-GB" sz="1200" b="0" i="0" u="none" strike="noStrike">
                         <a:solidFill>
@@ -10356,7 +10486,7 @@
                         <a:rPr lang="en-GB" sz="1200" u="none" strike="noStrike">
                           <a:effectLst/>
                         </a:rPr>
-                        <a:t>0.981</a:t>
+                        <a:t>0.926</a:t>
                       </a:r>
                       <a:endParaRPr lang="en-GB" sz="1200" b="0" i="0" u="none" strike="noStrike">
                         <a:solidFill>
@@ -10374,7 +10504,13 @@
                     <a:bodyPr/>
                     <a:lstStyle/>
                     <a:p>
-                      <a:pPr algn="l" fontAlgn="b"/>
+                      <a:pPr algn="r" fontAlgn="b"/>
+                      <a:r>
+                        <a:rPr lang="en-GB" sz="1200" u="none" strike="noStrike">
+                          <a:effectLst/>
+                        </a:rPr>
+                        <a:t>0.927</a:t>
+                      </a:r>
                       <a:endParaRPr lang="en-GB" sz="1200" b="0" i="0" u="none" strike="noStrike">
                         <a:solidFill>
                           <a:srgbClr val="000000"/>
@@ -10405,7 +10541,7 @@
                 </a:tc>
                 <a:extLst>
                   <a:ext uri="{0D108BD9-81ED-4DB2-BD59-A6C34878D82A}">
-                    <a16:rowId xmlns:a16="http://schemas.microsoft.com/office/drawing/2014/main" val="2849827121"/>
+                    <a16:rowId xmlns:a16="http://schemas.microsoft.com/office/drawing/2014/main" val="368093686"/>
                   </a:ext>
                 </a:extLst>
               </a:tr>
@@ -10420,7 +10556,7 @@
                         <a:rPr lang="en-GB" sz="1200" u="none" strike="noStrike">
                           <a:effectLst/>
                         </a:rPr>
-                        <a:t>M1 CH poor</a:t>
+                        <a:t>M5 CH poor</a:t>
                       </a:r>
                       <a:endParaRPr lang="en-GB" sz="1200" b="0" i="0" u="none" strike="noStrike">
                         <a:solidFill>
@@ -10443,7 +10579,7 @@
                         <a:rPr lang="en-GB" sz="1200" u="none" strike="noStrike">
                           <a:effectLst/>
                         </a:rPr>
-                        <a:t>0.984</a:t>
+                        <a:t>0.707</a:t>
                       </a:r>
                       <a:endParaRPr lang="en-GB" sz="1200" b="0" i="0" u="none" strike="noStrike">
                         <a:solidFill>
@@ -10461,7 +10597,13 @@
                     <a:bodyPr/>
                     <a:lstStyle/>
                     <a:p>
-                      <a:pPr algn="l" fontAlgn="b"/>
+                      <a:pPr algn="r" fontAlgn="b"/>
+                      <a:r>
+                        <a:rPr lang="en-GB" sz="1200" u="none" strike="noStrike">
+                          <a:effectLst/>
+                        </a:rPr>
+                        <a:t>0.97</a:t>
+                      </a:r>
                       <a:endParaRPr lang="en-GB" sz="1200" b="0" i="0" u="none" strike="noStrike">
                         <a:solidFill>
                           <a:srgbClr val="000000"/>
@@ -10492,7 +10634,7 @@
                 </a:tc>
                 <a:extLst>
                   <a:ext uri="{0D108BD9-81ED-4DB2-BD59-A6C34878D82A}">
-                    <a16:rowId xmlns:a16="http://schemas.microsoft.com/office/drawing/2014/main" val="2675906235"/>
+                    <a16:rowId xmlns:a16="http://schemas.microsoft.com/office/drawing/2014/main" val="4062195576"/>
                   </a:ext>
                 </a:extLst>
               </a:tr>
@@ -10507,7 +10649,7 @@
                         <a:rPr lang="en-GB" sz="1200" u="none" strike="noStrike">
                           <a:effectLst/>
                         </a:rPr>
-                        <a:t>M1 Kane rich</a:t>
+                        <a:t>M5 Kane rich</a:t>
                       </a:r>
                       <a:endParaRPr lang="en-GB" sz="1200" b="0" i="0" u="none" strike="noStrike">
                         <a:solidFill>
@@ -10530,7 +10672,7 @@
                         <a:rPr lang="en-GB" sz="1200" u="none" strike="noStrike">
                           <a:effectLst/>
                         </a:rPr>
-                        <a:t>0.888</a:t>
+                        <a:t>0.872</a:t>
                       </a:r>
                       <a:endParaRPr lang="en-GB" sz="1200" b="0" i="0" u="none" strike="noStrike">
                         <a:solidFill>
@@ -10548,7 +10690,13 @@
                     <a:bodyPr/>
                     <a:lstStyle/>
                     <a:p>
-                      <a:pPr algn="l" fontAlgn="b"/>
+                      <a:pPr algn="r" fontAlgn="b"/>
+                      <a:r>
+                        <a:rPr lang="en-GB" sz="1200" u="none" strike="noStrike">
+                          <a:effectLst/>
+                        </a:rPr>
+                        <a:t>0.964</a:t>
+                      </a:r>
                       <a:endParaRPr lang="en-GB" sz="1200" b="0" i="0" u="none" strike="noStrike">
                         <a:solidFill>
                           <a:srgbClr val="000000"/>
@@ -10579,7 +10727,7 @@
                 </a:tc>
                 <a:extLst>
                   <a:ext uri="{0D108BD9-81ED-4DB2-BD59-A6C34878D82A}">
-                    <a16:rowId xmlns:a16="http://schemas.microsoft.com/office/drawing/2014/main" val="3289453132"/>
+                    <a16:rowId xmlns:a16="http://schemas.microsoft.com/office/drawing/2014/main" val="3801366203"/>
                   </a:ext>
                 </a:extLst>
               </a:tr>
@@ -10594,7 +10742,7 @@
                         <a:rPr lang="en-GB" sz="1200" u="none" strike="noStrike">
                           <a:effectLst/>
                         </a:rPr>
-                        <a:t>M1 Kane poor</a:t>
+                        <a:t>M5 Kane poor</a:t>
                       </a:r>
                       <a:endParaRPr lang="en-GB" sz="1200" b="0" i="0" u="none" strike="noStrike">
                         <a:solidFill>
@@ -10617,7 +10765,7 @@
                         <a:rPr lang="en-GB" sz="1200" u="none" strike="noStrike">
                           <a:effectLst/>
                         </a:rPr>
-                        <a:t>0.951</a:t>
+                        <a:t>0.941</a:t>
                       </a:r>
                       <a:endParaRPr lang="en-GB" sz="1200" b="0" i="0" u="none" strike="noStrike">
                         <a:solidFill>
@@ -10635,7 +10783,13 @@
                     <a:bodyPr/>
                     <a:lstStyle/>
                     <a:p>
-                      <a:pPr algn="l" fontAlgn="b"/>
+                      <a:pPr algn="r" fontAlgn="b"/>
+                      <a:r>
+                        <a:rPr lang="en-GB" sz="1200" u="none" strike="noStrike">
+                          <a:effectLst/>
+                        </a:rPr>
+                        <a:t>0.929</a:t>
+                      </a:r>
                       <a:endParaRPr lang="en-GB" sz="1200" b="0" i="0" u="none" strike="noStrike">
                         <a:solidFill>
                           <a:srgbClr val="000000"/>
@@ -10666,7 +10820,7 @@
                 </a:tc>
                 <a:extLst>
                   <a:ext uri="{0D108BD9-81ED-4DB2-BD59-A6C34878D82A}">
-                    <a16:rowId xmlns:a16="http://schemas.microsoft.com/office/drawing/2014/main" val="877750572"/>
+                    <a16:rowId xmlns:a16="http://schemas.microsoft.com/office/drawing/2014/main" val="1355944797"/>
                   </a:ext>
                 </a:extLst>
               </a:tr>
@@ -10716,13 +10870,7 @@
                     <a:bodyPr/>
                     <a:lstStyle/>
                     <a:p>
-                      <a:pPr algn="r" fontAlgn="b"/>
-                      <a:r>
-                        <a:rPr lang="en-GB" sz="1200" u="none" strike="noStrike">
-                          <a:effectLst/>
-                        </a:rPr>
-                        <a:t>0.95</a:t>
-                      </a:r>
+                      <a:pPr algn="l" fontAlgn="b"/>
                       <a:endParaRPr lang="en-GB" sz="1200" b="0" i="0" u="none" strike="noStrike">
                         <a:solidFill>
                           <a:srgbClr val="000000"/>
@@ -10739,7 +10887,13 @@
                     <a:bodyPr/>
                     <a:lstStyle/>
                     <a:p>
-                      <a:pPr algn="l" fontAlgn="b"/>
+                      <a:pPr algn="r" fontAlgn="b"/>
+                      <a:r>
+                        <a:rPr lang="en-GB" sz="1200" u="none" strike="noStrike">
+                          <a:effectLst/>
+                        </a:rPr>
+                        <a:t>0.961</a:t>
+                      </a:r>
                       <a:endParaRPr lang="en-GB" sz="1200" b="0" i="0" u="none" strike="noStrike">
                         <a:solidFill>
                           <a:srgbClr val="000000"/>
@@ -10753,7 +10907,7 @@
                 </a:tc>
                 <a:extLst>
                   <a:ext uri="{0D108BD9-81ED-4DB2-BD59-A6C34878D82A}">
-                    <a16:rowId xmlns:a16="http://schemas.microsoft.com/office/drawing/2014/main" val="96026827"/>
+                    <a16:rowId xmlns:a16="http://schemas.microsoft.com/office/drawing/2014/main" val="1396361863"/>
                   </a:ext>
                 </a:extLst>
               </a:tr>
@@ -10803,13 +10957,7 @@
                     <a:bodyPr/>
                     <a:lstStyle/>
                     <a:p>
-                      <a:pPr algn="r" fontAlgn="b"/>
-                      <a:r>
-                        <a:rPr lang="en-GB" sz="1200" u="none" strike="noStrike">
-                          <a:effectLst/>
-                        </a:rPr>
-                        <a:t>0.98</a:t>
-                      </a:r>
+                      <a:pPr algn="l" fontAlgn="b"/>
                       <a:endParaRPr lang="en-GB" sz="1200" b="0" i="0" u="none" strike="noStrike">
                         <a:solidFill>
                           <a:srgbClr val="000000"/>
@@ -10826,7 +10974,13 @@
                     <a:bodyPr/>
                     <a:lstStyle/>
                     <a:p>
-                      <a:pPr algn="l" fontAlgn="b"/>
+                      <a:pPr algn="r" fontAlgn="b"/>
+                      <a:r>
+                        <a:rPr lang="en-GB" sz="1200" u="none" strike="noStrike">
+                          <a:effectLst/>
+                        </a:rPr>
+                        <a:t>0.972</a:t>
+                      </a:r>
                       <a:endParaRPr lang="en-GB" sz="1200" b="0" i="0" u="none" strike="noStrike">
                         <a:solidFill>
                           <a:srgbClr val="000000"/>
@@ -10840,7 +10994,7 @@
                 </a:tc>
                 <a:extLst>
                   <a:ext uri="{0D108BD9-81ED-4DB2-BD59-A6C34878D82A}">
-                    <a16:rowId xmlns:a16="http://schemas.microsoft.com/office/drawing/2014/main" val="2023902559"/>
+                    <a16:rowId xmlns:a16="http://schemas.microsoft.com/office/drawing/2014/main" val="1802091456"/>
                   </a:ext>
                 </a:extLst>
               </a:tr>
@@ -10890,378 +11044,6 @@
                     <a:bodyPr/>
                     <a:lstStyle/>
                     <a:p>
-                      <a:pPr algn="r" fontAlgn="b"/>
-                      <a:r>
-                        <a:rPr lang="en-GB" sz="1200" u="none" strike="noStrike">
-                          <a:effectLst/>
-                        </a:rPr>
-                        <a:t>0.988</a:t>
-                      </a:r>
-                      <a:endParaRPr lang="en-GB" sz="1200" b="0" i="0" u="none" strike="noStrike">
-                        <a:solidFill>
-                          <a:srgbClr val="000000"/>
-                        </a:solidFill>
-                        <a:effectLst/>
-                        <a:latin typeface="Calibri" panose="020F0502020204030204" pitchFamily="34" charset="0"/>
-                      </a:endParaRPr>
-                    </a:p>
-                  </a:txBody>
-                  <a:tcPr marL="9525" marR="9525" marT="9525" marB="0" anchor="b"/>
-                </a:tc>
-                <a:tc>
-                  <a:txBody>
-                    <a:bodyPr/>
-                    <a:lstStyle/>
-                    <a:p>
-                      <a:pPr algn="l" fontAlgn="b"/>
-                      <a:endParaRPr lang="en-GB" sz="1200" b="0" i="0" u="none" strike="noStrike">
-                        <a:solidFill>
-                          <a:srgbClr val="000000"/>
-                        </a:solidFill>
-                        <a:effectLst/>
-                        <a:latin typeface="Calibri" panose="020F0502020204030204" pitchFamily="34" charset="0"/>
-                      </a:endParaRPr>
-                    </a:p>
-                  </a:txBody>
-                  <a:tcPr marL="9525" marR="9525" marT="9525" marB="0" anchor="b"/>
-                </a:tc>
-                <a:extLst>
-                  <a:ext uri="{0D108BD9-81ED-4DB2-BD59-A6C34878D82A}">
-                    <a16:rowId xmlns:a16="http://schemas.microsoft.com/office/drawing/2014/main" val="1375215703"/>
-                  </a:ext>
-                </a:extLst>
-              </a:tr>
-              <a:tr h="203200">
-                <a:tc>
-                  <a:txBody>
-                    <a:bodyPr/>
-                    <a:lstStyle/>
-                    <a:p>
-                      <a:pPr algn="l" fontAlgn="b"/>
-                      <a:r>
-                        <a:rPr lang="en-GB" sz="1200" u="none" strike="noStrike">
-                          <a:effectLst/>
-                        </a:rPr>
-                        <a:t>M5 CH rich</a:t>
-                      </a:r>
-                      <a:endParaRPr lang="en-GB" sz="1200" b="0" i="0" u="none" strike="noStrike">
-                        <a:solidFill>
-                          <a:srgbClr val="000000"/>
-                        </a:solidFill>
-                        <a:effectLst/>
-                        <a:latin typeface="Calibri" panose="020F0502020204030204" pitchFamily="34" charset="0"/>
-                      </a:endParaRPr>
-                    </a:p>
-                  </a:txBody>
-                  <a:tcPr marL="9525" marR="9525" marT="9525" marB="0" anchor="b"/>
-                </a:tc>
-                <a:tc>
-                  <a:txBody>
-                    <a:bodyPr/>
-                    <a:lstStyle/>
-                    <a:p>
-                      <a:pPr algn="r" fontAlgn="b"/>
-                      <a:r>
-                        <a:rPr lang="en-GB" sz="1200" u="none" strike="noStrike">
-                          <a:effectLst/>
-                        </a:rPr>
-                        <a:t>0.949</a:t>
-                      </a:r>
-                      <a:endParaRPr lang="en-GB" sz="1200" b="0" i="0" u="none" strike="noStrike">
-                        <a:solidFill>
-                          <a:srgbClr val="000000"/>
-                        </a:solidFill>
-                        <a:effectLst/>
-                        <a:latin typeface="Calibri" panose="020F0502020204030204" pitchFamily="34" charset="0"/>
-                      </a:endParaRPr>
-                    </a:p>
-                  </a:txBody>
-                  <a:tcPr marL="9525" marR="9525" marT="9525" marB="0" anchor="b"/>
-                </a:tc>
-                <a:tc>
-                  <a:txBody>
-                    <a:bodyPr/>
-                    <a:lstStyle/>
-                    <a:p>
-                      <a:pPr algn="l" fontAlgn="b"/>
-                      <a:endParaRPr lang="en-GB" sz="1200" b="0" i="0" u="none" strike="noStrike">
-                        <a:solidFill>
-                          <a:srgbClr val="000000"/>
-                        </a:solidFill>
-                        <a:effectLst/>
-                        <a:latin typeface="Calibri" panose="020F0502020204030204" pitchFamily="34" charset="0"/>
-                      </a:endParaRPr>
-                    </a:p>
-                  </a:txBody>
-                  <a:tcPr marL="9525" marR="9525" marT="9525" marB="0" anchor="b"/>
-                </a:tc>
-                <a:tc>
-                  <a:txBody>
-                    <a:bodyPr/>
-                    <a:lstStyle/>
-                    <a:p>
-                      <a:pPr algn="r" fontAlgn="b"/>
-                      <a:r>
-                        <a:rPr lang="en-GB" sz="1200" u="none" strike="noStrike">
-                          <a:effectLst/>
-                        </a:rPr>
-                        <a:t>0.995</a:t>
-                      </a:r>
-                      <a:endParaRPr lang="en-GB" sz="1200" b="0" i="0" u="none" strike="noStrike">
-                        <a:solidFill>
-                          <a:srgbClr val="000000"/>
-                        </a:solidFill>
-                        <a:effectLst/>
-                        <a:latin typeface="Calibri" panose="020F0502020204030204" pitchFamily="34" charset="0"/>
-                      </a:endParaRPr>
-                    </a:p>
-                  </a:txBody>
-                  <a:tcPr marL="9525" marR="9525" marT="9525" marB="0" anchor="b"/>
-                </a:tc>
-                <a:extLst>
-                  <a:ext uri="{0D108BD9-81ED-4DB2-BD59-A6C34878D82A}">
-                    <a16:rowId xmlns:a16="http://schemas.microsoft.com/office/drawing/2014/main" val="2591035481"/>
-                  </a:ext>
-                </a:extLst>
-              </a:tr>
-              <a:tr h="203200">
-                <a:tc>
-                  <a:txBody>
-                    <a:bodyPr/>
-                    <a:lstStyle/>
-                    <a:p>
-                      <a:pPr algn="l" fontAlgn="b"/>
-                      <a:r>
-                        <a:rPr lang="en-GB" sz="1200" u="none" strike="noStrike">
-                          <a:effectLst/>
-                        </a:rPr>
-                        <a:t>M5 CH poor</a:t>
-                      </a:r>
-                      <a:endParaRPr lang="en-GB" sz="1200" b="0" i="0" u="none" strike="noStrike">
-                        <a:solidFill>
-                          <a:srgbClr val="000000"/>
-                        </a:solidFill>
-                        <a:effectLst/>
-                        <a:latin typeface="Calibri" panose="020F0502020204030204" pitchFamily="34" charset="0"/>
-                      </a:endParaRPr>
-                    </a:p>
-                  </a:txBody>
-                  <a:tcPr marL="9525" marR="9525" marT="9525" marB="0" anchor="b"/>
-                </a:tc>
-                <a:tc>
-                  <a:txBody>
-                    <a:bodyPr/>
-                    <a:lstStyle/>
-                    <a:p>
-                      <a:pPr algn="r" fontAlgn="b"/>
-                      <a:r>
-                        <a:rPr lang="en-GB" sz="1200" u="none" strike="noStrike">
-                          <a:effectLst/>
-                        </a:rPr>
-                        <a:t>0.903</a:t>
-                      </a:r>
-                      <a:endParaRPr lang="en-GB" sz="1200" b="0" i="0" u="none" strike="noStrike">
-                        <a:solidFill>
-                          <a:srgbClr val="000000"/>
-                        </a:solidFill>
-                        <a:effectLst/>
-                        <a:latin typeface="Calibri" panose="020F0502020204030204" pitchFamily="34" charset="0"/>
-                      </a:endParaRPr>
-                    </a:p>
-                  </a:txBody>
-                  <a:tcPr marL="9525" marR="9525" marT="9525" marB="0" anchor="b"/>
-                </a:tc>
-                <a:tc>
-                  <a:txBody>
-                    <a:bodyPr/>
-                    <a:lstStyle/>
-                    <a:p>
-                      <a:pPr algn="l" fontAlgn="b"/>
-                      <a:endParaRPr lang="en-GB" sz="1200" b="0" i="0" u="none" strike="noStrike">
-                        <a:solidFill>
-                          <a:srgbClr val="000000"/>
-                        </a:solidFill>
-                        <a:effectLst/>
-                        <a:latin typeface="Calibri" panose="020F0502020204030204" pitchFamily="34" charset="0"/>
-                      </a:endParaRPr>
-                    </a:p>
-                  </a:txBody>
-                  <a:tcPr marL="9525" marR="9525" marT="9525" marB="0" anchor="b"/>
-                </a:tc>
-                <a:tc>
-                  <a:txBody>
-                    <a:bodyPr/>
-                    <a:lstStyle/>
-                    <a:p>
-                      <a:pPr algn="r" fontAlgn="b"/>
-                      <a:r>
-                        <a:rPr lang="en-GB" sz="1200" u="none" strike="noStrike">
-                          <a:effectLst/>
-                        </a:rPr>
-                        <a:t>0.966</a:t>
-                      </a:r>
-                      <a:endParaRPr lang="en-GB" sz="1200" b="0" i="0" u="none" strike="noStrike">
-                        <a:solidFill>
-                          <a:srgbClr val="000000"/>
-                        </a:solidFill>
-                        <a:effectLst/>
-                        <a:latin typeface="Calibri" panose="020F0502020204030204" pitchFamily="34" charset="0"/>
-                      </a:endParaRPr>
-                    </a:p>
-                  </a:txBody>
-                  <a:tcPr marL="9525" marR="9525" marT="9525" marB="0" anchor="b"/>
-                </a:tc>
-                <a:extLst>
-                  <a:ext uri="{0D108BD9-81ED-4DB2-BD59-A6C34878D82A}">
-                    <a16:rowId xmlns:a16="http://schemas.microsoft.com/office/drawing/2014/main" val="616976347"/>
-                  </a:ext>
-                </a:extLst>
-              </a:tr>
-              <a:tr h="203200">
-                <a:tc>
-                  <a:txBody>
-                    <a:bodyPr/>
-                    <a:lstStyle/>
-                    <a:p>
-                      <a:pPr algn="l" fontAlgn="b"/>
-                      <a:r>
-                        <a:rPr lang="en-GB" sz="1200" u="none" strike="noStrike">
-                          <a:effectLst/>
-                        </a:rPr>
-                        <a:t>M5 Kane rich</a:t>
-                      </a:r>
-                      <a:endParaRPr lang="en-GB" sz="1200" b="0" i="0" u="none" strike="noStrike">
-                        <a:solidFill>
-                          <a:srgbClr val="000000"/>
-                        </a:solidFill>
-                        <a:effectLst/>
-                        <a:latin typeface="Calibri" panose="020F0502020204030204" pitchFamily="34" charset="0"/>
-                      </a:endParaRPr>
-                    </a:p>
-                  </a:txBody>
-                  <a:tcPr marL="9525" marR="9525" marT="9525" marB="0" anchor="b"/>
-                </a:tc>
-                <a:tc>
-                  <a:txBody>
-                    <a:bodyPr/>
-                    <a:lstStyle/>
-                    <a:p>
-                      <a:pPr algn="r" fontAlgn="b"/>
-                      <a:r>
-                        <a:rPr lang="en-GB" sz="1200" u="none" strike="noStrike">
-                          <a:effectLst/>
-                        </a:rPr>
-                        <a:t>0.815</a:t>
-                      </a:r>
-                      <a:endParaRPr lang="en-GB" sz="1200" b="0" i="0" u="none" strike="noStrike">
-                        <a:solidFill>
-                          <a:srgbClr val="000000"/>
-                        </a:solidFill>
-                        <a:effectLst/>
-                        <a:latin typeface="Calibri" panose="020F0502020204030204" pitchFamily="34" charset="0"/>
-                      </a:endParaRPr>
-                    </a:p>
-                  </a:txBody>
-                  <a:tcPr marL="9525" marR="9525" marT="9525" marB="0" anchor="b"/>
-                </a:tc>
-                <a:tc>
-                  <a:txBody>
-                    <a:bodyPr/>
-                    <a:lstStyle/>
-                    <a:p>
-                      <a:pPr algn="l" fontAlgn="b"/>
-                      <a:endParaRPr lang="en-GB" sz="1200" b="0" i="0" u="none" strike="noStrike">
-                        <a:solidFill>
-                          <a:srgbClr val="000000"/>
-                        </a:solidFill>
-                        <a:effectLst/>
-                        <a:latin typeface="Calibri" panose="020F0502020204030204" pitchFamily="34" charset="0"/>
-                      </a:endParaRPr>
-                    </a:p>
-                  </a:txBody>
-                  <a:tcPr marL="9525" marR="9525" marT="9525" marB="0" anchor="b"/>
-                </a:tc>
-                <a:tc>
-                  <a:txBody>
-                    <a:bodyPr/>
-                    <a:lstStyle/>
-                    <a:p>
-                      <a:pPr algn="r" fontAlgn="b"/>
-                      <a:r>
-                        <a:rPr lang="en-GB" sz="1200" u="none" strike="noStrike">
-                          <a:effectLst/>
-                        </a:rPr>
-                        <a:t>0.984</a:t>
-                      </a:r>
-                      <a:endParaRPr lang="en-GB" sz="1200" b="0" i="0" u="none" strike="noStrike">
-                        <a:solidFill>
-                          <a:srgbClr val="000000"/>
-                        </a:solidFill>
-                        <a:effectLst/>
-                        <a:latin typeface="Calibri" panose="020F0502020204030204" pitchFamily="34" charset="0"/>
-                      </a:endParaRPr>
-                    </a:p>
-                  </a:txBody>
-                  <a:tcPr marL="9525" marR="9525" marT="9525" marB="0" anchor="b"/>
-                </a:tc>
-                <a:extLst>
-                  <a:ext uri="{0D108BD9-81ED-4DB2-BD59-A6C34878D82A}">
-                    <a16:rowId xmlns:a16="http://schemas.microsoft.com/office/drawing/2014/main" val="41083189"/>
-                  </a:ext>
-                </a:extLst>
-              </a:tr>
-              <a:tr h="203200">
-                <a:tc>
-                  <a:txBody>
-                    <a:bodyPr/>
-                    <a:lstStyle/>
-                    <a:p>
-                      <a:pPr algn="l" fontAlgn="b"/>
-                      <a:r>
-                        <a:rPr lang="en-GB" sz="1200" u="none" strike="noStrike">
-                          <a:effectLst/>
-                        </a:rPr>
-                        <a:t>M5 Kane poor</a:t>
-                      </a:r>
-                      <a:endParaRPr lang="en-GB" sz="1200" b="0" i="0" u="none" strike="noStrike">
-                        <a:solidFill>
-                          <a:srgbClr val="000000"/>
-                        </a:solidFill>
-                        <a:effectLst/>
-                        <a:latin typeface="Calibri" panose="020F0502020204030204" pitchFamily="34" charset="0"/>
-                      </a:endParaRPr>
-                    </a:p>
-                  </a:txBody>
-                  <a:tcPr marL="9525" marR="9525" marT="9525" marB="0" anchor="b"/>
-                </a:tc>
-                <a:tc>
-                  <a:txBody>
-                    <a:bodyPr/>
-                    <a:lstStyle/>
-                    <a:p>
-                      <a:pPr algn="r" fontAlgn="b"/>
-                      <a:r>
-                        <a:rPr lang="en-GB" sz="1200" u="none" strike="noStrike">
-                          <a:effectLst/>
-                        </a:rPr>
-                        <a:t>0.861</a:t>
-                      </a:r>
-                      <a:endParaRPr lang="en-GB" sz="1200" b="0" i="0" u="none" strike="noStrike">
-                        <a:solidFill>
-                          <a:srgbClr val="000000"/>
-                        </a:solidFill>
-                        <a:effectLst/>
-                        <a:latin typeface="Calibri" panose="020F0502020204030204" pitchFamily="34" charset="0"/>
-                      </a:endParaRPr>
-                    </a:p>
-                  </a:txBody>
-                  <a:tcPr marL="9525" marR="9525" marT="9525" marB="0" anchor="b"/>
-                </a:tc>
-                <a:tc>
-                  <a:txBody>
-                    <a:bodyPr/>
-                    <a:lstStyle/>
-                    <a:p>
                       <a:pPr algn="l" fontAlgn="b"/>
                       <a:endParaRPr lang="en-GB" sz="1200" b="0" i="0" u="none" strike="noStrike">
                         <a:solidFill>
@@ -11284,7 +11066,7 @@
                         <a:rPr lang="en-GB" sz="1200" u="none" strike="noStrike" dirty="0">
                           <a:effectLst/>
                         </a:rPr>
-                        <a:t>0.941</a:t>
+                        <a:t>0.991</a:t>
                       </a:r>
                       <a:endParaRPr lang="en-GB" sz="1200" b="0" i="0" u="none" strike="noStrike" dirty="0">
                         <a:solidFill>
@@ -11299,7 +11081,7 @@
                 </a:tc>
                 <a:extLst>
                   <a:ext uri="{0D108BD9-81ED-4DB2-BD59-A6C34878D82A}">
-                    <a16:rowId xmlns:a16="http://schemas.microsoft.com/office/drawing/2014/main" val="484742647"/>
+                    <a16:rowId xmlns:a16="http://schemas.microsoft.com/office/drawing/2014/main" val="2969306807"/>
                   </a:ext>
                 </a:extLst>
               </a:tr>
@@ -11309,10 +11091,10 @@
       </p:graphicFrame>
       <p:sp>
         <p:nvSpPr>
-          <p:cNvPr id="4" name="TextBox 3">
-            <a:extLst>
-              <a:ext uri="{FF2B5EF4-FFF2-40B4-BE49-F238E27FC236}">
-                <a16:creationId xmlns:a16="http://schemas.microsoft.com/office/drawing/2014/main" id="{66462979-B6DA-0E43-C4CB-604BAB876E7F}"/>
+          <p:cNvPr id="6" name="TextBox 5">
+            <a:extLst>
+              <a:ext uri="{FF2B5EF4-FFF2-40B4-BE49-F238E27FC236}">
+                <a16:creationId xmlns:a16="http://schemas.microsoft.com/office/drawing/2014/main" id="{2EDAB6EE-09A4-809E-CB58-F9D0B4A26B65}"/>
               </a:ext>
             </a:extLst>
           </p:cNvPr>
@@ -11321,8 +11103,8 @@
         </p:nvSpPr>
         <p:spPr>
           <a:xfrm>
-            <a:off x="214686" y="1828800"/>
-            <a:ext cx="5327677" cy="369332"/>
+            <a:off x="951719" y="2251563"/>
+            <a:ext cx="2418162" cy="369332"/>
           </a:xfrm>
           <a:prstGeom prst="rect">
             <a:avLst/>
@@ -11337,7 +11119,7 @@
           <a:p>
             <a:r>
               <a:rPr lang="en-US" dirty="0"/>
-              <a:t>Parameter recovery for winning models (each dataset) </a:t>
+              <a:t>Reporting Pearson’s rho</a:t>
             </a:r>
           </a:p>
         </p:txBody>
@@ -11884,7 +11666,7 @@
         <p:spPr>
           <a:xfrm>
             <a:off x="79375" y="8433504"/>
-            <a:ext cx="6699250" cy="1446550"/>
+            <a:ext cx="6699250" cy="2123658"/>
           </a:xfrm>
           <a:prstGeom prst="rect">
             <a:avLst/>
@@ -11945,11 +11727,11 @@
             </a:r>
             <a:r>
               <a:rPr lang="en-US" sz="1100" dirty="0" err="1"/>
-              <a:t>softmax</a:t>
-            </a:r>
-            <a:r>
-              <a:rPr lang="en-US" sz="1100" dirty="0"/>
-              <a:t> model is better than different choice policies and learning rules)</a:t>
+              <a:t>softmax+avgRR</a:t>
+            </a:r>
+            <a:r>
+              <a:rPr lang="en-US" sz="1100" dirty="0"/>
+              <a:t> learning model is best)</a:t>
             </a:r>
           </a:p>
           <a:p>
@@ -11967,7 +11749,7 @@
             </a:r>
             <a:r>
               <a:rPr lang="en-US" sz="1100" dirty="0"/>
-              <a:t>model fit MLE from simulations </a:t>
+              <a:t>simulated leave times from best model</a:t>
             </a:r>
           </a:p>
           <a:p>
@@ -11985,7 +11767,7 @@
             </a:r>
             <a:r>
               <a:rPr lang="en-US" sz="1100" dirty="0"/>
-              <a:t>(28) = -3.1, </a:t>
+              <a:t>(28) = -3.12, </a:t>
             </a:r>
             <a:r>
               <a:rPr lang="en-US" sz="1100" i="1" dirty="0"/>
@@ -12003,7 +11785,23 @@
             </a:r>
             <a:r>
               <a:rPr lang="en-US" sz="1100" dirty="0"/>
-              <a:t>Correlation of participant beta fits with participant mean leaving times </a:t>
+              <a:t>Correlation of participant beta fits with participant mean leaving times  [</a:t>
+            </a:r>
+            <a:r>
+              <a:rPr lang="en-US" sz="1100" i="1" dirty="0"/>
+              <a:t>r</a:t>
+            </a:r>
+            <a:r>
+              <a:rPr lang="en-US" sz="1100" dirty="0"/>
+              <a:t>(56) = 0.64, </a:t>
+            </a:r>
+            <a:r>
+              <a:rPr lang="en-US" sz="1100" i="1" dirty="0"/>
+              <a:t>p</a:t>
+            </a:r>
+            <a:r>
+              <a:rPr lang="en-US" sz="1100" dirty="0"/>
+              <a:t> &lt; .001]</a:t>
             </a:r>
           </a:p>
           <a:p>
@@ -12017,15 +11815,129 @@
             </a:r>
             <a:r>
               <a:rPr lang="en-US" sz="1100" dirty="0"/>
-              <a:t>SDs of participants and</a:t>
+              <a:t>SD of </a:t>
             </a:r>
             <a:r>
               <a:rPr lang="en-US" sz="1100" b="1" dirty="0"/>
-              <a:t> (j) </a:t>
-            </a:r>
-            <a:r>
-              <a:rPr lang="en-US" sz="1100" dirty="0"/>
-              <a:t>simulated data aren’t statistically different across patch/env, as model predicts </a:t>
+              <a:t>participants</a:t>
+            </a:r>
+            <a:r>
+              <a:rPr lang="en-US" sz="1100" dirty="0"/>
+              <a:t> was not significantly different across patch, environment or interaction [Patch yield: </a:t>
+            </a:r>
+            <a:r>
+              <a:rPr lang="en-US" sz="1100" i="1" dirty="0"/>
+              <a:t>F</a:t>
+            </a:r>
+            <a:r>
+              <a:rPr lang="en-US" sz="1100" dirty="0"/>
+              <a:t>(1,112) = 0.53, </a:t>
+            </a:r>
+            <a:r>
+              <a:rPr lang="en-US" sz="1100" i="1" dirty="0"/>
+              <a:t>p</a:t>
+            </a:r>
+            <a:r>
+              <a:rPr lang="en-US" sz="1100" dirty="0"/>
+              <a:t> = 0.47; Environment: </a:t>
+            </a:r>
+            <a:r>
+              <a:rPr lang="en-US" sz="1100" i="1" dirty="0"/>
+              <a:t>F</a:t>
+            </a:r>
+            <a:r>
+              <a:rPr lang="en-US" sz="1100" dirty="0"/>
+              <a:t>(1,112) = 2.39, </a:t>
+            </a:r>
+            <a:r>
+              <a:rPr lang="en-US" sz="1100" i="1" dirty="0"/>
+              <a:t>p</a:t>
+            </a:r>
+            <a:r>
+              <a:rPr lang="en-US" sz="1100" dirty="0"/>
+              <a:t> = 0.13; Interaction: </a:t>
+            </a:r>
+            <a:r>
+              <a:rPr lang="en-US" sz="1100" i="1" dirty="0"/>
+              <a:t>F</a:t>
+            </a:r>
+            <a:r>
+              <a:rPr lang="en-US" sz="1100" dirty="0"/>
+              <a:t>(1,112) = 0.01, </a:t>
+            </a:r>
+            <a:r>
+              <a:rPr lang="en-US" sz="1100" i="1" dirty="0"/>
+              <a:t>p</a:t>
+            </a:r>
+            <a:r>
+              <a:rPr lang="en-US" sz="1100" dirty="0"/>
+              <a:t> = 0.91], as model predicts</a:t>
+            </a:r>
+          </a:p>
+          <a:p>
+            <a:r>
+              <a:rPr lang="en-US" sz="1100" b="1" dirty="0"/>
+              <a:t>(j) </a:t>
+            </a:r>
+            <a:r>
+              <a:rPr lang="en-US" sz="1100" dirty="0"/>
+              <a:t>Consistent with participants, SD of </a:t>
+            </a:r>
+            <a:r>
+              <a:rPr lang="en-US" sz="1100" b="1" dirty="0"/>
+              <a:t>simulated </a:t>
+            </a:r>
+            <a:r>
+              <a:rPr lang="en-US" sz="1100" dirty="0"/>
+              <a:t>leaving times was not significantly different across patch, environment or interaction [Patch yield: </a:t>
+            </a:r>
+            <a:r>
+              <a:rPr lang="en-US" sz="1100" i="1" dirty="0"/>
+              <a:t>F</a:t>
+            </a:r>
+            <a:r>
+              <a:rPr lang="en-US" sz="1100" dirty="0"/>
+              <a:t>(1,112) = 0.83, </a:t>
+            </a:r>
+            <a:r>
+              <a:rPr lang="en-US" sz="1100" i="1" dirty="0"/>
+              <a:t>p</a:t>
+            </a:r>
+            <a:r>
+              <a:rPr lang="en-US" sz="1100" dirty="0"/>
+              <a:t> = 0.37; Environment: </a:t>
+            </a:r>
+            <a:r>
+              <a:rPr lang="en-US" sz="1100" i="1" dirty="0"/>
+              <a:t>F</a:t>
+            </a:r>
+            <a:r>
+              <a:rPr lang="en-US" sz="1100" dirty="0"/>
+              <a:t>(1,112) = 1.41, </a:t>
+            </a:r>
+            <a:r>
+              <a:rPr lang="en-US" sz="1100" i="1" dirty="0"/>
+              <a:t>p</a:t>
+            </a:r>
+            <a:r>
+              <a:rPr lang="en-US" sz="1100" dirty="0"/>
+              <a:t> = 0.24; Interaction: </a:t>
+            </a:r>
+            <a:r>
+              <a:rPr lang="en-US" sz="1100" i="1" dirty="0"/>
+              <a:t>F</a:t>
+            </a:r>
+            <a:r>
+              <a:rPr lang="en-US" sz="1100" dirty="0"/>
+              <a:t>(1,112) = 1.64, </a:t>
+            </a:r>
+            <a:r>
+              <a:rPr lang="en-US" sz="1100" i="1" dirty="0"/>
+              <a:t>p</a:t>
+            </a:r>
+            <a:r>
+              <a:rPr lang="en-US" sz="1100" dirty="0"/>
+              <a:t> = 0.20] </a:t>
             </a:r>
           </a:p>
         </p:txBody>
@@ -12294,7 +12206,7 @@
         <p:spPr>
           <a:xfrm>
             <a:off x="1419676" y="4599721"/>
-            <a:ext cx="530915" cy="369332"/>
+            <a:ext cx="415498" cy="369332"/>
           </a:xfrm>
           <a:prstGeom prst="rect">
             <a:avLst/>
@@ -12309,7 +12221,7 @@
           <a:p>
             <a:r>
               <a:rPr lang="en-US" dirty="0"/>
-              <a:t>***</a:t>
+              <a:t>**</a:t>
             </a:r>
           </a:p>
         </p:txBody>
@@ -12611,7 +12523,7 @@
         <p:spPr>
           <a:xfrm>
             <a:off x="230846" y="7845417"/>
-            <a:ext cx="5972534" cy="1107996"/>
+            <a:ext cx="5972534" cy="1277273"/>
           </a:xfrm>
           <a:prstGeom prst="rect">
             <a:avLst/>
@@ -12630,7 +12542,7 @@
             </a:r>
             <a:r>
               <a:rPr lang="en-US" sz="1100" dirty="0"/>
-              <a:t>Fit alpha rho is not significantly different between environments (</a:t>
+              <a:t>Learning rate fits for average reward rate is not significantly different between environments (</a:t>
             </a:r>
             <a:r>
               <a:rPr lang="en-US" sz="1100" i="1" dirty="0"/>
@@ -12656,7 +12568,7 @@
             </a:r>
             <a:r>
               <a:rPr lang="en-US" sz="1100" dirty="0"/>
-              <a:t>Participant leaving times decrease as fit alpha rho increases [Rich env: </a:t>
+              <a:t>Participant leaving times decrease as their fit learning rate increases [</a:t>
             </a:r>
             <a:r>
               <a:rPr lang="en-US" sz="1100" i="1" dirty="0"/>
@@ -12664,7 +12576,7 @@
             </a:r>
             <a:r>
               <a:rPr lang="en-US" sz="1100" dirty="0"/>
-              <a:t>(27) = -.71, </a:t>
+              <a:t>(56) = -.73, </a:t>
             </a:r>
             <a:r>
               <a:rPr lang="en-US" sz="1100" i="1" dirty="0"/>
@@ -12672,23 +12584,7 @@
             </a:r>
             <a:r>
               <a:rPr lang="en-US" sz="1100" dirty="0"/>
-              <a:t> &lt; .001; Poor env: </a:t>
-            </a:r>
-            <a:r>
-              <a:rPr lang="en-US" sz="1100" i="1" dirty="0"/>
-              <a:t>r</a:t>
-            </a:r>
-            <a:r>
-              <a:rPr lang="en-US" sz="1100" dirty="0"/>
-              <a:t>(27) = -.83, </a:t>
-            </a:r>
-            <a:r>
-              <a:rPr lang="en-US" sz="1100" i="1" dirty="0"/>
-              <a:t>p</a:t>
-            </a:r>
-            <a:r>
-              <a:rPr lang="en-US" sz="1100" dirty="0"/>
-              <a:t> &lt; .001). But this was driven by a few participants who had very short leaving times. Beta alone was unable to capture their early leaving </a:t>
+              <a:t> &lt; .001, Spearman’s rho]. [[But this was driven by a few participants who had very short leaving times. Beta alone was unable to capture their early leaving </a:t>
             </a:r>
             <a:r>
               <a:rPr lang="en-US" sz="1100" dirty="0" err="1"/>
@@ -12720,7 +12616,7 @@
             </a:r>
             <a:r>
               <a:rPr lang="en-US" sz="1100" dirty="0"/>
-              <a:t> equation, which leads to earlier leaving. </a:t>
+              <a:t> equation, which leads to earlier leaving. ]]</a:t>
             </a:r>
           </a:p>
         </p:txBody>
@@ -12757,10 +12653,10 @@
       </p:grpSpPr>
       <p:pic>
         <p:nvPicPr>
-          <p:cNvPr id="81" name="Graphic 80">
-            <a:extLst>
-              <a:ext uri="{FF2B5EF4-FFF2-40B4-BE49-F238E27FC236}">
-                <a16:creationId xmlns:a16="http://schemas.microsoft.com/office/drawing/2014/main" id="{92FA70E5-84AF-9042-E09B-EE6FCFBACAAB}"/>
+          <p:cNvPr id="3" name="Graphic 2">
+            <a:extLst>
+              <a:ext uri="{FF2B5EF4-FFF2-40B4-BE49-F238E27FC236}">
+                <a16:creationId xmlns:a16="http://schemas.microsoft.com/office/drawing/2014/main" id="{D44113A5-EBFF-716A-B8C6-D2C0DF0704F1}"/>
               </a:ext>
             </a:extLst>
           </p:cNvPr>
@@ -12783,7 +12679,7 @@
         </p:blipFill>
         <p:spPr>
           <a:xfrm>
-            <a:off x="706069" y="2334871"/>
+            <a:off x="755677" y="345619"/>
             <a:ext cx="1879600" cy="1879600"/>
           </a:xfrm>
           <a:prstGeom prst="rect">
@@ -12793,10 +12689,10 @@
       </p:pic>
       <p:pic>
         <p:nvPicPr>
-          <p:cNvPr id="89" name="Graphic 88">
-            <a:extLst>
-              <a:ext uri="{FF2B5EF4-FFF2-40B4-BE49-F238E27FC236}">
-                <a16:creationId xmlns:a16="http://schemas.microsoft.com/office/drawing/2014/main" id="{FA0924AC-D788-BFE2-39B3-8273D36294F0}"/>
+          <p:cNvPr id="81" name="Graphic 80">
+            <a:extLst>
+              <a:ext uri="{FF2B5EF4-FFF2-40B4-BE49-F238E27FC236}">
+                <a16:creationId xmlns:a16="http://schemas.microsoft.com/office/drawing/2014/main" id="{92FA70E5-84AF-9042-E09B-EE6FCFBACAAB}"/>
               </a:ext>
             </a:extLst>
           </p:cNvPr>
@@ -12819,7 +12715,7 @@
         </p:blipFill>
         <p:spPr>
           <a:xfrm>
-            <a:off x="3000362" y="4305521"/>
+            <a:off x="706069" y="2334871"/>
             <a:ext cx="1879600" cy="1879600"/>
           </a:xfrm>
           <a:prstGeom prst="rect">
@@ -12829,10 +12725,10 @@
       </p:pic>
       <p:pic>
         <p:nvPicPr>
-          <p:cNvPr id="91" name="Graphic 90">
-            <a:extLst>
-              <a:ext uri="{FF2B5EF4-FFF2-40B4-BE49-F238E27FC236}">
-                <a16:creationId xmlns:a16="http://schemas.microsoft.com/office/drawing/2014/main" id="{239A0F11-33AE-93E4-E4D7-32FECFFA4DFC}"/>
+          <p:cNvPr id="89" name="Graphic 88">
+            <a:extLst>
+              <a:ext uri="{FF2B5EF4-FFF2-40B4-BE49-F238E27FC236}">
+                <a16:creationId xmlns:a16="http://schemas.microsoft.com/office/drawing/2014/main" id="{FA0924AC-D788-BFE2-39B3-8273D36294F0}"/>
               </a:ext>
             </a:extLst>
           </p:cNvPr>
@@ -12855,7 +12751,7 @@
         </p:blipFill>
         <p:spPr>
           <a:xfrm>
-            <a:off x="631120" y="4320695"/>
+            <a:off x="3000362" y="4305521"/>
             <a:ext cx="1879600" cy="1879600"/>
           </a:xfrm>
           <a:prstGeom prst="rect">
@@ -12865,10 +12761,10 @@
       </p:pic>
       <p:pic>
         <p:nvPicPr>
-          <p:cNvPr id="95" name="Graphic 94">
-            <a:extLst>
-              <a:ext uri="{FF2B5EF4-FFF2-40B4-BE49-F238E27FC236}">
-                <a16:creationId xmlns:a16="http://schemas.microsoft.com/office/drawing/2014/main" id="{6C97A261-FBBC-534D-AE02-E5F3FFA7F598}"/>
+          <p:cNvPr id="91" name="Graphic 90">
+            <a:extLst>
+              <a:ext uri="{FF2B5EF4-FFF2-40B4-BE49-F238E27FC236}">
+                <a16:creationId xmlns:a16="http://schemas.microsoft.com/office/drawing/2014/main" id="{239A0F11-33AE-93E4-E4D7-32FECFFA4DFC}"/>
               </a:ext>
             </a:extLst>
           </p:cNvPr>
@@ -12891,7 +12787,7 @@
         </p:blipFill>
         <p:spPr>
           <a:xfrm>
-            <a:off x="2694427" y="6243432"/>
+            <a:off x="631120" y="4320695"/>
             <a:ext cx="1879600" cy="1879600"/>
           </a:xfrm>
           <a:prstGeom prst="rect">
@@ -12901,10 +12797,10 @@
       </p:pic>
       <p:pic>
         <p:nvPicPr>
-          <p:cNvPr id="97" name="Graphic 96">
-            <a:extLst>
-              <a:ext uri="{FF2B5EF4-FFF2-40B4-BE49-F238E27FC236}">
-                <a16:creationId xmlns:a16="http://schemas.microsoft.com/office/drawing/2014/main" id="{5116ADD7-A575-FB32-4B7A-0D321EE9E590}"/>
+          <p:cNvPr id="95" name="Graphic 94">
+            <a:extLst>
+              <a:ext uri="{FF2B5EF4-FFF2-40B4-BE49-F238E27FC236}">
+                <a16:creationId xmlns:a16="http://schemas.microsoft.com/office/drawing/2014/main" id="{6C97A261-FBBC-534D-AE02-E5F3FFA7F598}"/>
               </a:ext>
             </a:extLst>
           </p:cNvPr>
@@ -12927,7 +12823,7 @@
         </p:blipFill>
         <p:spPr>
           <a:xfrm>
-            <a:off x="4783063" y="2248899"/>
+            <a:off x="2694427" y="6243432"/>
             <a:ext cx="1879600" cy="1879600"/>
           </a:xfrm>
           <a:prstGeom prst="rect">
@@ -12937,10 +12833,10 @@
       </p:pic>
       <p:pic>
         <p:nvPicPr>
-          <p:cNvPr id="71" name="Graphic 70">
-            <a:extLst>
-              <a:ext uri="{FF2B5EF4-FFF2-40B4-BE49-F238E27FC236}">
-                <a16:creationId xmlns:a16="http://schemas.microsoft.com/office/drawing/2014/main" id="{7279808C-2986-AD22-AA8E-A9DF8D4EB799}"/>
+          <p:cNvPr id="97" name="Graphic 96">
+            <a:extLst>
+              <a:ext uri="{FF2B5EF4-FFF2-40B4-BE49-F238E27FC236}">
+                <a16:creationId xmlns:a16="http://schemas.microsoft.com/office/drawing/2014/main" id="{5116ADD7-A575-FB32-4B7A-0D321EE9E590}"/>
               </a:ext>
             </a:extLst>
           </p:cNvPr>
@@ -12963,7 +12859,7 @@
         </p:blipFill>
         <p:spPr>
           <a:xfrm>
-            <a:off x="843945" y="6140306"/>
+            <a:off x="4783063" y="2248899"/>
             <a:ext cx="1879600" cy="1879600"/>
           </a:xfrm>
           <a:prstGeom prst="rect">
@@ -12973,10 +12869,10 @@
       </p:pic>
       <p:pic>
         <p:nvPicPr>
-          <p:cNvPr id="42" name="Graphic 41">
-            <a:extLst>
-              <a:ext uri="{FF2B5EF4-FFF2-40B4-BE49-F238E27FC236}">
-                <a16:creationId xmlns:a16="http://schemas.microsoft.com/office/drawing/2014/main" id="{A9F18589-8B3F-BF1D-037F-D251CD5B6966}"/>
+          <p:cNvPr id="71" name="Graphic 70">
+            <a:extLst>
+              <a:ext uri="{FF2B5EF4-FFF2-40B4-BE49-F238E27FC236}">
+                <a16:creationId xmlns:a16="http://schemas.microsoft.com/office/drawing/2014/main" id="{7279808C-2986-AD22-AA8E-A9DF8D4EB799}"/>
               </a:ext>
             </a:extLst>
           </p:cNvPr>
@@ -12999,7 +12895,7 @@
         </p:blipFill>
         <p:spPr>
           <a:xfrm>
-            <a:off x="2946076" y="364027"/>
+            <a:off x="843945" y="6140306"/>
             <a:ext cx="1879600" cy="1879600"/>
           </a:xfrm>
           <a:prstGeom prst="rect">
@@ -13009,10 +12905,10 @@
       </p:pic>
       <p:pic>
         <p:nvPicPr>
-          <p:cNvPr id="44" name="Graphic 43">
-            <a:extLst>
-              <a:ext uri="{FF2B5EF4-FFF2-40B4-BE49-F238E27FC236}">
-                <a16:creationId xmlns:a16="http://schemas.microsoft.com/office/drawing/2014/main" id="{A8F90A03-E230-F93A-16A6-482F9429267A}"/>
+          <p:cNvPr id="42" name="Graphic 41">
+            <a:extLst>
+              <a:ext uri="{FF2B5EF4-FFF2-40B4-BE49-F238E27FC236}">
+                <a16:creationId xmlns:a16="http://schemas.microsoft.com/office/drawing/2014/main" id="{A9F18589-8B3F-BF1D-037F-D251CD5B6966}"/>
               </a:ext>
             </a:extLst>
           </p:cNvPr>
@@ -13035,7 +12931,7 @@
         </p:blipFill>
         <p:spPr>
           <a:xfrm>
-            <a:off x="4809103" y="312366"/>
+            <a:off x="2946076" y="364027"/>
             <a:ext cx="1879600" cy="1879600"/>
           </a:xfrm>
           <a:prstGeom prst="rect">
@@ -13045,10 +12941,10 @@
       </p:pic>
       <p:pic>
         <p:nvPicPr>
-          <p:cNvPr id="50" name="Graphic 49">
-            <a:extLst>
-              <a:ext uri="{FF2B5EF4-FFF2-40B4-BE49-F238E27FC236}">
-                <a16:creationId xmlns:a16="http://schemas.microsoft.com/office/drawing/2014/main" id="{81F3B08A-001E-E338-45EB-AD836CECB45C}"/>
+          <p:cNvPr id="44" name="Graphic 43">
+            <a:extLst>
+              <a:ext uri="{FF2B5EF4-FFF2-40B4-BE49-F238E27FC236}">
+                <a16:creationId xmlns:a16="http://schemas.microsoft.com/office/drawing/2014/main" id="{A8F90A03-E230-F93A-16A6-482F9429267A}"/>
               </a:ext>
             </a:extLst>
           </p:cNvPr>
@@ -13071,7 +12967,7 @@
         </p:blipFill>
         <p:spPr>
           <a:xfrm>
-            <a:off x="739475" y="352137"/>
+            <a:off x="4809103" y="312366"/>
             <a:ext cx="1879600" cy="1879600"/>
           </a:xfrm>
           <a:prstGeom prst="rect">
@@ -13130,7 +13026,7 @@
         <p:spPr>
           <a:xfrm>
             <a:off x="79375" y="8116128"/>
-            <a:ext cx="6699250" cy="1954381"/>
+            <a:ext cx="6699250" cy="2292935"/>
           </a:xfrm>
           <a:prstGeom prst="rect">
             <a:avLst/>
@@ -13195,15 +13091,7 @@
             </a:r>
             <a:r>
               <a:rPr lang="en-US" sz="1100" dirty="0"/>
-              <a:t> learning model is better than different choice policies and other learning rules (no learning of </a:t>
-            </a:r>
-            <a:r>
-              <a:rPr lang="en-US" sz="1100" dirty="0" err="1"/>
-              <a:t>patchRR</a:t>
-            </a:r>
-            <a:r>
-              <a:rPr lang="en-US" sz="1100" dirty="0"/>
-              <a:t>) )</a:t>
+              <a:t> learning model is best)</a:t>
             </a:r>
           </a:p>
           <a:p>
@@ -13221,7 +13109,7 @@
             </a:r>
             <a:r>
               <a:rPr lang="en-US" sz="1100" dirty="0"/>
-              <a:t>model fit MLE from simulations </a:t>
+              <a:t>simulated leave times from best model</a:t>
             </a:r>
           </a:p>
           <a:p>
@@ -13231,7 +13119,23 @@
             </a:r>
             <a:r>
               <a:rPr lang="en-US" sz="1100" dirty="0"/>
-              <a:t>Fit beta significantly lower in rich compared to poor environment  </a:t>
+              <a:t>Fit beta significantly lower in rich compared to poor environment  [</a:t>
+            </a:r>
+            <a:r>
+              <a:rPr lang="en-US" sz="1100" i="1" dirty="0"/>
+              <a:t>t</a:t>
+            </a:r>
+            <a:r>
+              <a:rPr lang="en-US" sz="1100" dirty="0"/>
+              <a:t>(7) = -7.88, </a:t>
+            </a:r>
+            <a:r>
+              <a:rPr lang="en-US" sz="1100" i="1" dirty="0"/>
+              <a:t>p</a:t>
+            </a:r>
+            <a:r>
+              <a:rPr lang="en-US" sz="1100" dirty="0"/>
+              <a:t> &lt; .001]</a:t>
             </a:r>
           </a:p>
           <a:p>
@@ -13241,7 +13145,23 @@
             </a:r>
             <a:r>
               <a:rPr lang="en-US" sz="1100" dirty="0"/>
-              <a:t>Correlation of participant beta fits with participant mean leaving times </a:t>
+              <a:t>Correlation of participant beta fits with participant mean leaving times  [</a:t>
+            </a:r>
+            <a:r>
+              <a:rPr lang="en-US" sz="1100" i="1" dirty="0"/>
+              <a:t>r</a:t>
+            </a:r>
+            <a:r>
+              <a:rPr lang="en-US" sz="1100" dirty="0"/>
+              <a:t>(14) = 0.94, </a:t>
+            </a:r>
+            <a:r>
+              <a:rPr lang="en-US" sz="1100" i="1" dirty="0"/>
+              <a:t>p</a:t>
+            </a:r>
+            <a:r>
+              <a:rPr lang="en-US" sz="1100" dirty="0"/>
+              <a:t> &lt; .001].</a:t>
             </a:r>
           </a:p>
           <a:p>
@@ -13255,21 +13175,128 @@
             </a:r>
             <a:r>
               <a:rPr lang="en-US" sz="1100" dirty="0"/>
-              <a:t>SD participants - Main effect of patch (p&lt;.001) and environment (p&lt;.001) but no interaction (p = 0.52). </a:t>
-            </a:r>
-          </a:p>
-          <a:p>
+              <a:t>SD of </a:t>
+            </a:r>
             <a:r>
               <a:rPr lang="en-US" sz="1100" b="1" dirty="0"/>
-              <a:t>j) </a:t>
-            </a:r>
-            <a:r>
-              <a:rPr lang="en-US" sz="1100" dirty="0"/>
-              <a:t>SD simulated - Main effect of patch (p&lt;.001) and environment (p&lt;.001) AND interaction (p = 0.001). </a:t>
-            </a:r>
-          </a:p>
-          <a:p>
-            <a:endParaRPr lang="en-US" sz="1100" dirty="0"/>
+              <a:t>participants</a:t>
+            </a:r>
+            <a:r>
+              <a:rPr lang="en-US" sz="1100" dirty="0"/>
+              <a:t> was significantly different for patch [Patch yield: </a:t>
+            </a:r>
+            <a:r>
+              <a:rPr lang="en-US" sz="1100" i="1" dirty="0"/>
+              <a:t>F</a:t>
+            </a:r>
+            <a:r>
+              <a:rPr lang="en-US" sz="1100" dirty="0"/>
+              <a:t>(2,42) = 10.76, </a:t>
+            </a:r>
+            <a:r>
+              <a:rPr lang="en-US" sz="1100" i="1" dirty="0"/>
+              <a:t>p</a:t>
+            </a:r>
+            <a:r>
+              <a:rPr lang="en-US" sz="1100" dirty="0"/>
+              <a:t> &lt; .001] and environment [Environment: </a:t>
+            </a:r>
+            <a:r>
+              <a:rPr lang="en-US" sz="1100" i="1" dirty="0"/>
+              <a:t>F</a:t>
+            </a:r>
+            <a:r>
+              <a:rPr lang="en-US" sz="1100" dirty="0"/>
+              <a:t>(1,42) = 29.41, </a:t>
+            </a:r>
+            <a:r>
+              <a:rPr lang="en-US" sz="1100" i="1" dirty="0"/>
+              <a:t>p</a:t>
+            </a:r>
+            <a:r>
+              <a:rPr lang="en-US" sz="1100" dirty="0"/>
+              <a:t> &lt; .001] but not for patch x environment interaction [Interaction: </a:t>
+            </a:r>
+            <a:r>
+              <a:rPr lang="en-US" sz="1100" i="1" dirty="0"/>
+              <a:t>F</a:t>
+            </a:r>
+            <a:r>
+              <a:rPr lang="en-US" sz="1100" dirty="0"/>
+              <a:t>(2,42) = 0.66, </a:t>
+            </a:r>
+            <a:r>
+              <a:rPr lang="en-US" sz="1100" i="1" dirty="0"/>
+              <a:t>p</a:t>
+            </a:r>
+            <a:r>
+              <a:rPr lang="en-US" sz="1100" dirty="0"/>
+              <a:t> = 0.52] </a:t>
+            </a:r>
+            <a:r>
+              <a:rPr lang="en-US" sz="1100" b="1" dirty="0"/>
+              <a:t>(j) </a:t>
+            </a:r>
+            <a:r>
+              <a:rPr lang="en-US" sz="1100" dirty="0"/>
+              <a:t>Consistent with participants, SD of </a:t>
+            </a:r>
+            <a:r>
+              <a:rPr lang="en-US" sz="1100" b="1" dirty="0"/>
+              <a:t>simulated </a:t>
+            </a:r>
+            <a:r>
+              <a:rPr lang="en-US" sz="1100" dirty="0"/>
+              <a:t>leaving times was significantly different across patch [Patch yield: </a:t>
+            </a:r>
+            <a:r>
+              <a:rPr lang="en-US" sz="1100" i="1" dirty="0"/>
+              <a:t>F</a:t>
+            </a:r>
+            <a:r>
+              <a:rPr lang="en-US" sz="1100" dirty="0"/>
+              <a:t>(2,42) = 14.4, </a:t>
+            </a:r>
+            <a:r>
+              <a:rPr lang="en-US" sz="1100" i="1" dirty="0"/>
+              <a:t>p</a:t>
+            </a:r>
+            <a:r>
+              <a:rPr lang="en-US" sz="1100" dirty="0"/>
+              <a:t> &lt; .001], and environment [Environment: </a:t>
+            </a:r>
+            <a:r>
+              <a:rPr lang="en-US" sz="1100" i="1" dirty="0"/>
+              <a:t>F</a:t>
+            </a:r>
+            <a:r>
+              <a:rPr lang="en-US" sz="1100" dirty="0"/>
+              <a:t>(1,42) = 31.76, </a:t>
+            </a:r>
+            <a:r>
+              <a:rPr lang="en-US" sz="1100" i="1" dirty="0"/>
+              <a:t>p</a:t>
+            </a:r>
+            <a:r>
+              <a:rPr lang="en-US" sz="1100" dirty="0"/>
+              <a:t> &lt; .001] , but predicted significant patch x environment interaction [Interaction: </a:t>
+            </a:r>
+            <a:r>
+              <a:rPr lang="en-US" sz="1100" i="1" dirty="0"/>
+              <a:t>F</a:t>
+            </a:r>
+            <a:r>
+              <a:rPr lang="en-US" sz="1100" dirty="0"/>
+              <a:t>(2,42) = 7.96, </a:t>
+            </a:r>
+            <a:r>
+              <a:rPr lang="en-US" sz="1100" i="1" dirty="0"/>
+              <a:t>p</a:t>
+            </a:r>
+            <a:r>
+              <a:rPr lang="en-US" sz="1100" dirty="0"/>
+              <a:t> = .001], which was not observed in participant data</a:t>
+            </a:r>
           </a:p>
         </p:txBody>
       </p:sp>
